--- a/defence_presentation.pptx
+++ b/defence_presentation.pptx
@@ -3292,7 +3292,7 @@
           </a:p>
           <a:p>
             <a:pPr>
-              <a:defRPr sz="1600">
+              <a:defRPr sz="1500">
                 <a:solidFill>
                   <a:srgbClr val="D4AF37"/>
                 </a:solidFill>
@@ -3450,7 +3450,7 @@
         </p:nvSpPr>
         <p:spPr>
           <a:xfrm>
-            <a:off x="731520" y="365760"/>
+            <a:off x="731520" y="320040"/>
             <a:ext cx="10728655" cy="822960"/>
           </a:xfrm>
           <a:prstGeom prst="rect">
@@ -3481,7 +3481,7 @@
           </a:p>
           <a:p>
             <a:pPr>
-              <a:defRPr sz="2200" b="1">
+              <a:defRPr sz="2100" b="1">
                 <a:solidFill>
                   <a:srgbClr val="0F2043"/>
                 </a:solidFill>
@@ -3502,7 +3502,7 @@
         </p:nvSpPr>
         <p:spPr>
           <a:xfrm>
-            <a:off x="731520" y="1234440"/>
+            <a:off x="731520" y="1188720"/>
             <a:ext cx="10728655" cy="36576"/>
           </a:xfrm>
           <a:prstGeom prst="rect">
@@ -3546,7 +3546,7 @@
         <p:spPr>
           <a:xfrm>
             <a:off x="731520" y="6446520"/>
-            <a:ext cx="10728655" cy="320040"/>
+            <a:ext cx="8686800" cy="320040"/>
           </a:xfrm>
           <a:prstGeom prst="rect">
             <a:avLst/>
@@ -3571,19 +3571,6 @@
               <a:t>University of Verona | Department of Economics  •  Murtuza Yusuf Rangwala  •  Supervisor: Prof. Giuseppina Chesini</a:t>
             </a:r>
           </a:p>
-          <a:p>
-            <a:pPr algn="r">
-              <a:defRPr sz="900" b="1">
-                <a:solidFill>
-                  <a:srgbClr val="0F2043"/>
-                </a:solidFill>
-                <a:latin typeface="Calibri"/>
-              </a:defRPr>
-            </a:pPr>
-            <a:r>
-              <a:t>Slide 10 of 14</a:t>
-            </a:r>
-          </a:p>
         </p:txBody>
       </p:sp>
       <p:sp>
@@ -3630,8 +3617,8 @@
         </p:nvSpPr>
         <p:spPr>
           <a:xfrm>
-            <a:off x="731520" y="1463040"/>
-            <a:ext cx="3383280" cy="4663440"/>
+            <a:off x="731520" y="1371600"/>
+            <a:ext cx="4937760" cy="2331720"/>
           </a:xfrm>
           <a:prstGeom prst="roundRect">
             <a:avLst/>
@@ -3675,8 +3662,8 @@
         </p:nvSpPr>
         <p:spPr>
           <a:xfrm>
-            <a:off x="914400" y="1645920"/>
-            <a:ext cx="3017520" cy="4297680"/>
+            <a:off x="914400" y="1508760"/>
+            <a:ext cx="4572000" cy="2057400"/>
           </a:xfrm>
           <a:prstGeom prst="rect">
             <a:avLst/>
@@ -3691,9 +3678,9 @@
           <a:p>
             <a:pPr>
               <a:spcAft>
-                <a:spcPts val="800"/>
+                <a:spcPts val="400"/>
               </a:spcAft>
-              <a:defRPr sz="1400" b="1">
+              <a:defRPr sz="1250" b="1">
                 <a:solidFill>
                   <a:srgbClr val="0F2043"/>
                 </a:solidFill>
@@ -3701,17 +3688,17 @@
               </a:defRPr>
             </a:pPr>
             <a:r>
-              <a:t>1. Decile Sorting &amp; Weighting</a:t>
+              <a:t>1. Decile Sorting &amp; Portfolio Weighting</a:t>
             </a:r>
           </a:p>
           <a:p>
             <a:pPr>
               <a:spcAft>
-                <a:spcPts val="800"/>
+                <a:spcPts val="400"/>
               </a:spcAft>
             </a:pPr>
             <a:r>
-              <a:rPr b="1" sz="1050">
+              <a:rPr b="1" sz="1000">
                 <a:solidFill>
                   <a:srgbClr val="0F2043"/>
                 </a:solidFill>
@@ -3719,22 +3706,22 @@
               <a:t>• Decile Sorting: </a:t>
             </a:r>
             <a:r>
-              <a:rPr sz="1000">
+              <a:rPr sz="950">
                 <a:solidFill>
                   <a:srgbClr val="1E293B"/>
                 </a:solidFill>
               </a:rPr>
-              <a:t> Daily ranking of S&amp;P 500 cross-section based on model predicted return $\hat{y}_{i,t}$.</a:t>
+              <a:t> Daily ranking of cross-section based on predicted return $\hat{y}_{i,t}$.</a:t>
             </a:r>
           </a:p>
           <a:p>
             <a:pPr>
               <a:spcAft>
-                <a:spcPts val="800"/>
+                <a:spcPts val="400"/>
               </a:spcAft>
             </a:pPr>
             <a:r>
-              <a:rPr b="1" sz="1050">
+              <a:rPr b="1" sz="1000">
                 <a:solidFill>
                   <a:srgbClr val="0F2043"/>
                 </a:solidFill>
@@ -3742,35 +3729,35 @@
               <a:t>• Long-Short Allocation: </a:t>
             </a:r>
             <a:r>
-              <a:rPr sz="1000">
+              <a:rPr sz="950">
                 <a:solidFill>
                   <a:srgbClr val="1E293B"/>
                 </a:solidFill>
               </a:rPr>
-              <a:t> Long Top Decile ($D_{10}$), Short Bottom Decile ($D_1$). Dollar-neutral balancing.</a:t>
+              <a:t> Long Top Decile ($D_{10}$), Short Bottom Decile ($D_1$). Dollar-neutral.</a:t>
             </a:r>
           </a:p>
           <a:p>
             <a:pPr>
               <a:spcAft>
-                <a:spcPts val="800"/>
+                <a:spcPts val="400"/>
               </a:spcAft>
             </a:pPr>
             <a:r>
-              <a:rPr b="1" sz="1050">
+              <a:rPr b="1" sz="1000">
                 <a:solidFill>
                   <a:srgbClr val="0F2043"/>
                 </a:solidFill>
               </a:rPr>
-              <a:t>• Volatility Target: </a:t>
-            </a:r>
-            <a:r>
-              <a:rPr sz="1000">
+              <a:t>• Target Volatility: </a:t>
+            </a:r>
+            <a:r>
+              <a:rPr sz="950">
                 <a:solidFill>
                   <a:srgbClr val="1E293B"/>
                 </a:solidFill>
               </a:rPr>
-              <a:t> Portfolio scaled to 15% annualized target volatility cap.</a:t>
+              <a:t> Portfolio scaled to 15% annualized volatility cap.</a:t>
             </a:r>
           </a:p>
         </p:txBody>
@@ -3783,8 +3770,8 @@
         </p:nvSpPr>
         <p:spPr>
           <a:xfrm>
-            <a:off x="4389120" y="1463040"/>
-            <a:ext cx="3383280" cy="4663440"/>
+            <a:off x="731520" y="3886200"/>
+            <a:ext cx="4937760" cy="2331720"/>
           </a:xfrm>
           <a:prstGeom prst="roundRect">
             <a:avLst/>
@@ -3828,8 +3815,8 @@
         </p:nvSpPr>
         <p:spPr>
           <a:xfrm>
-            <a:off x="4572000" y="1645920"/>
-            <a:ext cx="3017520" cy="4297680"/>
+            <a:off x="914400" y="4023360"/>
+            <a:ext cx="4572000" cy="2057400"/>
           </a:xfrm>
           <a:prstGeom prst="rect">
             <a:avLst/>
@@ -3844,9 +3831,9 @@
           <a:p>
             <a:pPr>
               <a:spcAft>
-                <a:spcPts val="800"/>
+                <a:spcPts val="400"/>
               </a:spcAft>
-              <a:defRPr sz="1400" b="1">
+              <a:defRPr sz="1250" b="1">
                 <a:solidFill>
                   <a:srgbClr val="A51C30"/>
                 </a:solidFill>
@@ -3854,17 +3841,17 @@
               </a:defRPr>
             </a:pPr>
             <a:r>
-              <a:t>2. 1-Day Execution Buffer &amp; Fees</a:t>
+              <a:t>2. Execution Buffer &amp; Transaction Friction</a:t>
             </a:r>
           </a:p>
           <a:p>
             <a:pPr>
               <a:spcAft>
-                <a:spcPts val="800"/>
+                <a:spcPts val="400"/>
               </a:spcAft>
             </a:pPr>
             <a:r>
-              <a:rPr b="1" sz="1050">
+              <a:rPr b="1" sz="1000">
                 <a:solidFill>
                   <a:srgbClr val="A51C30"/>
                 </a:solidFill>
@@ -3872,45 +3859,22 @@
               <a:t>• 1-Day Execution Lag: </a:t>
             </a:r>
             <a:r>
-              <a:rPr sz="1000">
+              <a:rPr sz="950">
                 <a:solidFill>
                   <a:srgbClr val="1E293B"/>
                 </a:solidFill>
               </a:rPr>
-              <a:t> Signals calculated at Market Close $T$, trades executed at Market Open $T+1$.</a:t>
+              <a:t> Signals computed at Close $T$, executed at Open $T+1$ (No lookahead).</a:t>
             </a:r>
           </a:p>
           <a:p>
             <a:pPr>
               <a:spcAft>
-                <a:spcPts val="800"/>
+                <a:spcPts val="400"/>
               </a:spcAft>
             </a:pPr>
             <a:r>
-              <a:rPr b="1" sz="1050">
-                <a:solidFill>
-                  <a:srgbClr val="A51C30"/>
-                </a:solidFill>
-              </a:rPr>
-              <a:t>• No Lookahead Bias: </a:t>
-            </a:r>
-            <a:r>
-              <a:rPr sz="1000">
-                <a:solidFill>
-                  <a:srgbClr val="1E293B"/>
-                </a:solidFill>
-              </a:rPr>
-              <a:t> Ensures all fundamental and price data are fully settled before trade entry.</a:t>
-            </a:r>
-          </a:p>
-          <a:p>
-            <a:pPr>
-              <a:spcAft>
-                <a:spcPts val="800"/>
-              </a:spcAft>
-            </a:pPr>
-            <a:r>
-              <a:rPr b="1" sz="1050">
+              <a:rPr b="1" sz="1000">
                 <a:solidFill>
                   <a:srgbClr val="A51C30"/>
                 </a:solidFill>
@@ -3918,12 +3882,35 @@
               <a:t>• Friction Evaluation: </a:t>
             </a:r>
             <a:r>
-              <a:rPr sz="1000">
+              <a:rPr sz="950">
                 <a:solidFill>
                   <a:srgbClr val="1E293B"/>
                 </a:solidFill>
               </a:rPr>
-              <a:t> Model stress-tested across 0 bps, 5 bps, 10 bps, and 20 bps transaction costs.</a:t>
+              <a:t> Model stress-tested across 0, 5, 10, and 20 bps transaction fees.</a:t>
+            </a:r>
+          </a:p>
+          <a:p>
+            <a:pPr>
+              <a:spcAft>
+                <a:spcPts val="400"/>
+              </a:spcAft>
+            </a:pPr>
+            <a:r>
+              <a:rPr b="1" sz="1000">
+                <a:solidFill>
+                  <a:srgbClr val="A51C30"/>
+                </a:solidFill>
+              </a:rPr>
+              <a:t>• Breakeven Fee Capacity: </a:t>
+            </a:r>
+            <a:r>
+              <a:rPr sz="950">
+                <a:solidFill>
+                  <a:srgbClr val="1E293B"/>
+                </a:solidFill>
+              </a:rPr>
+              <a:t> Strategy maintains positive net CAGR up to 34.2 bps fee drag.</a:t>
             </a:r>
           </a:p>
         </p:txBody>
@@ -3936,14 +3923,14 @@
         </p:nvSpPr>
         <p:spPr>
           <a:xfrm>
-            <a:off x="8046720" y="1463040"/>
-            <a:ext cx="3383280" cy="4663440"/>
+            <a:off x="5943600" y="1371600"/>
+            <a:ext cx="5516575" cy="4846320"/>
           </a:xfrm>
           <a:prstGeom prst="roundRect">
             <a:avLst/>
           </a:prstGeom>
           <a:solidFill>
-            <a:srgbClr val="FEF9C3"/>
+            <a:srgbClr val="FFFFFF"/>
           </a:solidFill>
           <a:ln w="19050">
             <a:solidFill>
@@ -3981,8 +3968,8 @@
         </p:nvSpPr>
         <p:spPr>
           <a:xfrm>
-            <a:off x="8229600" y="1645920"/>
-            <a:ext cx="3017520" cy="4297680"/>
+            <a:off x="6080760" y="1463040"/>
+            <a:ext cx="5242255" cy="320040"/>
           </a:xfrm>
           <a:prstGeom prst="rect">
             <a:avLst/>
@@ -3990,16 +3977,13 @@
           <a:noFill/>
         </p:spPr>
         <p:txBody>
-          <a:bodyPr wrap="square">
+          <a:bodyPr wrap="square" lIns="0" tIns="0" rIns="0" bIns="0">
             <a:spAutoFit/>
           </a:bodyPr>
           <a:lstStyle/>
           <a:p>
-            <a:pPr>
-              <a:spcAft>
-                <a:spcPts val="800"/>
-              </a:spcAft>
-              <a:defRPr sz="1400" b="1">
+            <a:pPr algn="ctr">
+              <a:defRPr sz="1100" b="1">
                 <a:solidFill>
                   <a:srgbClr val="0F2043"/>
                 </a:solidFill>
@@ -4007,80 +3991,35 @@
               </a:defRPr>
             </a:pPr>
             <a:r>
-              <a:t>3. Dynamic Risk Circuit Breakers</a:t>
-            </a:r>
-          </a:p>
-          <a:p>
-            <a:pPr>
-              <a:spcAft>
-                <a:spcPts val="800"/>
-              </a:spcAft>
-            </a:pPr>
-            <a:r>
-              <a:rPr b="1" sz="1050">
-                <a:solidFill>
-                  <a:srgbClr val="0F2043"/>
-                </a:solidFill>
-              </a:rPr>
-              <a:t>• 2:1 Take-Profit / Stop-Loss: </a:t>
-            </a:r>
-            <a:r>
-              <a:rPr sz="1000">
-                <a:solidFill>
-                  <a:srgbClr val="1E293B"/>
-                </a:solidFill>
-              </a:rPr>
-              <a:t> Dynamic position exit triggered at +4% profit target or -2% stop-loss threshold.</a:t>
-            </a:r>
-          </a:p>
-          <a:p>
-            <a:pPr>
-              <a:spcAft>
-                <a:spcPts val="800"/>
-              </a:spcAft>
-            </a:pPr>
-            <a:r>
-              <a:rPr b="1" sz="1050">
-                <a:solidFill>
-                  <a:srgbClr val="0F2043"/>
-                </a:solidFill>
-              </a:rPr>
-              <a:t>• Drawdown Halt: </a:t>
-            </a:r>
-            <a:r>
-              <a:rPr sz="1000">
-                <a:solidFill>
-                  <a:srgbClr val="1E293B"/>
-                </a:solidFill>
-              </a:rPr>
-              <a:t> Hard portfolio exit if peak-to-trough drawdown exceeds 10%.</a:t>
-            </a:r>
-          </a:p>
-          <a:p>
-            <a:pPr>
-              <a:spcAft>
-                <a:spcPts val="800"/>
-              </a:spcAft>
-            </a:pPr>
-            <a:r>
-              <a:rPr b="1" sz="1050">
-                <a:solidFill>
-                  <a:srgbClr val="0F2043"/>
-                </a:solidFill>
-              </a:rPr>
-              <a:t>• Single-Stock Cap: </a:t>
-            </a:r>
-            <a:r>
-              <a:rPr sz="1000">
-                <a:solidFill>
-                  <a:srgbClr val="1E293B"/>
-                </a:solidFill>
-              </a:rPr>
-              <a:t> Max position weight limited to 5% total portfolio equity.</a:t>
-            </a:r>
-          </a:p>
-        </p:txBody>
-      </p:sp>
+              <a:t>Figure 4.6: Take-Profit / Stop-Loss (TPSL) Circuit Breaker Impact</a:t>
+            </a:r>
+          </a:p>
+        </p:txBody>
+      </p:sp>
+      <p:pic>
+        <p:nvPicPr>
+          <p:cNvPr id="12" name="Picture 11" descr="stop_loss_impact_curves.png"/>
+          <p:cNvPicPr>
+            <a:picLocks noChangeAspect="1"/>
+          </p:cNvPicPr>
+          <p:nvPr/>
+        </p:nvPicPr>
+        <p:blipFill>
+          <a:blip r:embed="rId2"/>
+          <a:stretch>
+            <a:fillRect/>
+          </a:stretch>
+        </p:blipFill>
+        <p:spPr>
+          <a:xfrm>
+            <a:off x="6126480" y="2169261"/>
+            <a:ext cx="5150815" cy="3433876"/>
+          </a:xfrm>
+          <a:prstGeom prst="rect">
+            <a:avLst/>
+          </a:prstGeom>
+        </p:spPr>
+      </p:pic>
     </p:spTree>
   </p:cSld>
   <p:clrMapOvr>
@@ -4115,7 +4054,7 @@
         </p:nvSpPr>
         <p:spPr>
           <a:xfrm>
-            <a:off x="731520" y="365760"/>
+            <a:off x="731520" y="320040"/>
             <a:ext cx="10728655" cy="822960"/>
           </a:xfrm>
           <a:prstGeom prst="rect">
@@ -4146,7 +4085,7 @@
           </a:p>
           <a:p>
             <a:pPr>
-              <a:defRPr sz="2200" b="1">
+              <a:defRPr sz="2100" b="1">
                 <a:solidFill>
                   <a:srgbClr val="0F2043"/>
                 </a:solidFill>
@@ -4167,7 +4106,7 @@
         </p:nvSpPr>
         <p:spPr>
           <a:xfrm>
-            <a:off x="731520" y="1234440"/>
+            <a:off x="731520" y="1188720"/>
             <a:ext cx="10728655" cy="36576"/>
           </a:xfrm>
           <a:prstGeom prst="rect">
@@ -4211,7 +4150,7 @@
         <p:spPr>
           <a:xfrm>
             <a:off x="731520" y="6446520"/>
-            <a:ext cx="10728655" cy="320040"/>
+            <a:ext cx="8686800" cy="320040"/>
           </a:xfrm>
           <a:prstGeom prst="rect">
             <a:avLst/>
@@ -4234,19 +4173,6 @@
             </a:pPr>
             <a:r>
               <a:t>University of Verona | Department of Economics  •  Murtuza Yusuf Rangwala  •  Supervisor: Prof. Giuseppina Chesini</a:t>
-            </a:r>
-          </a:p>
-          <a:p>
-            <a:pPr algn="r">
-              <a:defRPr sz="900" b="1">
-                <a:solidFill>
-                  <a:srgbClr val="0F2043"/>
-                </a:solidFill>
-                <a:latin typeface="Calibri"/>
-              </a:defRPr>
-            </a:pPr>
-            <a:r>
-              <a:t>Slide 11 of 14</a:t>
             </a:r>
           </a:p>
         </p:txBody>
@@ -4296,8 +4222,8 @@
           <p:nvPr/>
         </p:nvGraphicFramePr>
         <p:xfrm>
-          <a:off x="731520" y="1463040"/>
-          <a:ext cx="6217920" cy="4663440"/>
+          <a:off x="731520" y="1371600"/>
+          <a:ext cx="4937760" cy="2468880"/>
         </p:xfrm>
         <a:graphic>
           <a:graphicData uri="http://schemas.openxmlformats.org/drawingml/2006/table">
@@ -4306,20 +4232,20 @@
                 <a:tableStyleId>{5C22544A-7EE6-4342-B048-85BDC9FD1C3A}</a:tableStyleId>
               </a:tblPr>
               <a:tblGrid>
-                <a:gridCol w="1645920"/>
-                <a:gridCol w="1188720"/>
-                <a:gridCol w="1097280"/>
-                <a:gridCol w="1188720"/>
-                <a:gridCol w="1097280"/>
+                <a:gridCol w="1280160"/>
+                <a:gridCol w="914400"/>
+                <a:gridCol w="914400"/>
+                <a:gridCol w="914400"/>
+                <a:gridCol w="914400"/>
               </a:tblGrid>
-              <a:tr h="932688">
+              <a:tr h="493776">
                 <a:tc>
                   <a:txBody>
                     <a:bodyPr/>
                     <a:lstStyle/>
                     <a:p>
                       <a:pPr algn="ctr">
-                        <a:defRPr sz="1100" b="1">
+                        <a:defRPr sz="1050" b="1">
                           <a:solidFill>
                             <a:srgbClr val="FFFFFF"/>
                           </a:solidFill>
@@ -4343,7 +4269,7 @@
                     <a:lstStyle/>
                     <a:p>
                       <a:pPr algn="ctr">
-                        <a:defRPr sz="1100" b="1">
+                        <a:defRPr sz="1050" b="1">
                           <a:solidFill>
                             <a:srgbClr val="FFFFFF"/>
                           </a:solidFill>
@@ -4367,7 +4293,7 @@
                     <a:lstStyle/>
                     <a:p>
                       <a:pPr algn="ctr">
-                        <a:defRPr sz="1100" b="1">
+                        <a:defRPr sz="1050" b="1">
                           <a:solidFill>
                             <a:srgbClr val="FFFFFF"/>
                           </a:solidFill>
@@ -4391,7 +4317,7 @@
                     <a:lstStyle/>
                     <a:p>
                       <a:pPr algn="ctr">
-                        <a:defRPr sz="1100" b="1">
+                        <a:defRPr sz="1050" b="1">
                           <a:solidFill>
                             <a:srgbClr val="FFFFFF"/>
                           </a:solidFill>
@@ -4415,7 +4341,7 @@
                     <a:lstStyle/>
                     <a:p>
                       <a:pPr algn="ctr">
-                        <a:defRPr sz="1100" b="1">
+                        <a:defRPr sz="1050" b="1">
                           <a:solidFill>
                             <a:srgbClr val="FFFFFF"/>
                           </a:solidFill>
@@ -4434,14 +4360,14 @@
                   </a:tcPr>
                 </a:tc>
               </a:tr>
-              <a:tr h="932688">
+              <a:tr h="493776">
                 <a:tc>
                   <a:txBody>
                     <a:bodyPr/>
                     <a:lstStyle/>
                     <a:p>
                       <a:pPr algn="l">
-                        <a:defRPr sz="1050" b="1">
+                        <a:defRPr sz="1000" b="1">
                           <a:solidFill>
                             <a:srgbClr val="0F2043"/>
                           </a:solidFill>
@@ -4449,7 +4375,7 @@
                         </a:defRPr>
                       </a:pPr>
                       <a:r>
-                        <a:t>0 bps (Frictionless)</a:t>
+                        <a:t>0 bps (Base)</a:t>
                       </a:r>
                     </a:p>
                   </a:txBody>
@@ -4465,7 +4391,7 @@
                     <a:lstStyle/>
                     <a:p>
                       <a:pPr algn="ctr">
-                        <a:defRPr sz="1050">
+                        <a:defRPr sz="1000">
                           <a:solidFill>
                             <a:srgbClr val="1E293B"/>
                           </a:solidFill>
@@ -4489,7 +4415,7 @@
                     <a:lstStyle/>
                     <a:p>
                       <a:pPr algn="ctr">
-                        <a:defRPr sz="1050">
+                        <a:defRPr sz="1000">
                           <a:solidFill>
                             <a:srgbClr val="1E293B"/>
                           </a:solidFill>
@@ -4513,7 +4439,7 @@
                     <a:lstStyle/>
                     <a:p>
                       <a:pPr algn="ctr">
-                        <a:defRPr sz="1050">
+                        <a:defRPr sz="1000">
                           <a:solidFill>
                             <a:srgbClr val="1E293B"/>
                           </a:solidFill>
@@ -4537,7 +4463,7 @@
                     <a:lstStyle/>
                     <a:p>
                       <a:pPr algn="ctr">
-                        <a:defRPr sz="1050">
+                        <a:defRPr sz="1000">
                           <a:solidFill>
                             <a:srgbClr val="1E293B"/>
                           </a:solidFill>
@@ -4556,14 +4482,14 @@
                   </a:tcPr>
                 </a:tc>
               </a:tr>
-              <a:tr h="932688">
+              <a:tr h="493776">
                 <a:tc>
                   <a:txBody>
                     <a:bodyPr/>
                     <a:lstStyle/>
                     <a:p>
                       <a:pPr algn="l">
-                        <a:defRPr sz="1050" b="1">
+                        <a:defRPr sz="1000" b="1">
                           <a:solidFill>
                             <a:srgbClr val="0F2043"/>
                           </a:solidFill>
@@ -4587,7 +4513,7 @@
                     <a:lstStyle/>
                     <a:p>
                       <a:pPr algn="ctr">
-                        <a:defRPr sz="1050">
+                        <a:defRPr sz="1000">
                           <a:solidFill>
                             <a:srgbClr val="1E293B"/>
                           </a:solidFill>
@@ -4611,7 +4537,7 @@
                     <a:lstStyle/>
                     <a:p>
                       <a:pPr algn="ctr">
-                        <a:defRPr sz="1050">
+                        <a:defRPr sz="1000">
                           <a:solidFill>
                             <a:srgbClr val="1E293B"/>
                           </a:solidFill>
@@ -4635,7 +4561,7 @@
                     <a:lstStyle/>
                     <a:p>
                       <a:pPr algn="ctr">
-                        <a:defRPr sz="1050">
+                        <a:defRPr sz="1000">
                           <a:solidFill>
                             <a:srgbClr val="1E293B"/>
                           </a:solidFill>
@@ -4659,7 +4585,7 @@
                     <a:lstStyle/>
                     <a:p>
                       <a:pPr algn="ctr">
-                        <a:defRPr sz="1050">
+                        <a:defRPr sz="1000">
                           <a:solidFill>
                             <a:srgbClr val="1E293B"/>
                           </a:solidFill>
@@ -4678,14 +4604,14 @@
                   </a:tcPr>
                 </a:tc>
               </a:tr>
-              <a:tr h="932688">
+              <a:tr h="493776">
                 <a:tc>
                   <a:txBody>
                     <a:bodyPr/>
                     <a:lstStyle/>
                     <a:p>
                       <a:pPr algn="l">
-                        <a:defRPr sz="1050" b="1">
+                        <a:defRPr sz="1000" b="1">
                           <a:solidFill>
                             <a:srgbClr val="0F2043"/>
                           </a:solidFill>
@@ -4693,7 +4619,7 @@
                         </a:defRPr>
                       </a:pPr>
                       <a:r>
-                        <a:t>15 bps (Medium)</a:t>
+                        <a:t>15 bps (Med)</a:t>
                       </a:r>
                     </a:p>
                   </a:txBody>
@@ -4709,7 +4635,7 @@
                     <a:lstStyle/>
                     <a:p>
                       <a:pPr algn="ctr">
-                        <a:defRPr sz="1050">
+                        <a:defRPr sz="1000">
                           <a:solidFill>
                             <a:srgbClr val="1E293B"/>
                           </a:solidFill>
@@ -4733,7 +4659,7 @@
                     <a:lstStyle/>
                     <a:p>
                       <a:pPr algn="ctr">
-                        <a:defRPr sz="1050">
+                        <a:defRPr sz="1000">
                           <a:solidFill>
                             <a:srgbClr val="1E293B"/>
                           </a:solidFill>
@@ -4757,7 +4683,7 @@
                     <a:lstStyle/>
                     <a:p>
                       <a:pPr algn="ctr">
-                        <a:defRPr sz="1050">
+                        <a:defRPr sz="1000">
                           <a:solidFill>
                             <a:srgbClr val="1E293B"/>
                           </a:solidFill>
@@ -4781,7 +4707,7 @@
                     <a:lstStyle/>
                     <a:p>
                       <a:pPr algn="ctr">
-                        <a:defRPr sz="1050">
+                        <a:defRPr sz="1000">
                           <a:solidFill>
                             <a:srgbClr val="1E293B"/>
                           </a:solidFill>
@@ -4800,14 +4726,14 @@
                   </a:tcPr>
                 </a:tc>
               </a:tr>
-              <a:tr h="932688">
+              <a:tr h="493776">
                 <a:tc>
                   <a:txBody>
                     <a:bodyPr/>
                     <a:lstStyle/>
                     <a:p>
                       <a:pPr algn="l">
-                        <a:defRPr sz="1050" b="1">
+                        <a:defRPr sz="1000" b="1">
                           <a:solidFill>
                             <a:srgbClr val="0F2043"/>
                           </a:solidFill>
@@ -4815,7 +4741,7 @@
                         </a:defRPr>
                       </a:pPr>
                       <a:r>
-                        <a:t>20 bps (High Fee)</a:t>
+                        <a:t>20 bps (High)</a:t>
                       </a:r>
                     </a:p>
                   </a:txBody>
@@ -4831,7 +4757,7 @@
                     <a:lstStyle/>
                     <a:p>
                       <a:pPr algn="ctr">
-                        <a:defRPr sz="1050">
+                        <a:defRPr sz="1000">
                           <a:solidFill>
                             <a:srgbClr val="1E293B"/>
                           </a:solidFill>
@@ -4855,7 +4781,7 @@
                     <a:lstStyle/>
                     <a:p>
                       <a:pPr algn="ctr">
-                        <a:defRPr sz="1050">
+                        <a:defRPr sz="1000">
                           <a:solidFill>
                             <a:srgbClr val="1E293B"/>
                           </a:solidFill>
@@ -4879,7 +4805,7 @@
                     <a:lstStyle/>
                     <a:p>
                       <a:pPr algn="ctr">
-                        <a:defRPr sz="1050">
+                        <a:defRPr sz="1000">
                           <a:solidFill>
                             <a:srgbClr val="1E293B"/>
                           </a:solidFill>
@@ -4903,7 +4829,7 @@
                     <a:lstStyle/>
                     <a:p>
                       <a:pPr algn="ctr">
-                        <a:defRPr sz="1050">
+                        <a:defRPr sz="1000">
                           <a:solidFill>
                             <a:srgbClr val="1E293B"/>
                           </a:solidFill>
@@ -4934,8 +4860,8 @@
         </p:nvSpPr>
         <p:spPr>
           <a:xfrm>
-            <a:off x="7223760" y="1463040"/>
-            <a:ext cx="4236415" cy="4663440"/>
+            <a:off x="731520" y="3977639"/>
+            <a:ext cx="4937760" cy="2240280"/>
           </a:xfrm>
           <a:prstGeom prst="roundRect">
             <a:avLst/>
@@ -4979,8 +4905,8 @@
         </p:nvSpPr>
         <p:spPr>
           <a:xfrm>
-            <a:off x="7406640" y="1645920"/>
-            <a:ext cx="3870655" cy="4297680"/>
+            <a:off x="914400" y="4114799"/>
+            <a:ext cx="4572000" cy="1965960"/>
           </a:xfrm>
           <a:prstGeom prst="rect">
             <a:avLst/>
@@ -4995,9 +4921,9 @@
           <a:p>
             <a:pPr>
               <a:spcAft>
-                <a:spcPts val="800"/>
+                <a:spcPts val="400"/>
               </a:spcAft>
-              <a:defRPr sz="1400" b="1">
+              <a:defRPr sz="1250" b="1">
                 <a:solidFill>
                   <a:srgbClr val="166534"/>
                 </a:solidFill>
@@ -5011,16 +4937,16 @@
           <a:p>
             <a:pPr>
               <a:spcAft>
-                <a:spcPts val="600"/>
+                <a:spcPts val="400"/>
               </a:spcAft>
             </a:pPr>
             <a:r>
-              <a:rPr b="1" sz="1050">
+              <a:rPr b="1" sz="1000">
                 <a:solidFill>
                   <a:srgbClr val="0F2043"/>
                 </a:solidFill>
               </a:rPr>
-              <a:t>• $6,482.10 Net Account Value:</a:t>
+              <a:t>• $6,482.10 Net Account Value: </a:t>
             </a:r>
             <a:r>
               <a:rPr sz="950">
@@ -5028,23 +4954,22 @@
                   <a:srgbClr val="1E293B"/>
                 </a:solidFill>
               </a:rPr>
-              <a:t>
-Initial $1,000 USD equity grows to $6,482.10 (+548% net return) under realistic 10 bps fee drag.</a:t>
+              <a:t> Initial $1k grows to $6,482.10 (+548% net) under 10 bps fees.</a:t>
             </a:r>
           </a:p>
           <a:p>
             <a:pPr>
               <a:spcAft>
-                <a:spcPts val="600"/>
+                <a:spcPts val="400"/>
               </a:spcAft>
             </a:pPr>
             <a:r>
-              <a:rPr b="1" sz="1050">
+              <a:rPr b="1" sz="1000">
                 <a:solidFill>
                   <a:srgbClr val="0F2043"/>
                 </a:solidFill>
               </a:rPr>
-              <a:t>• 34.2 bps Breakeven Capacity:</a:t>
+              <a:t>• Controlled Volatility: </a:t>
             </a:r>
             <a:r>
               <a:rPr sz="950">
@@ -5052,23 +4977,22 @@
                   <a:srgbClr val="1E293B"/>
                 </a:solidFill>
               </a:rPr>
-              <a:t>
-The signal remains net profitable up to 34.2 bps fee drag per trade, confirming institutional viability.</a:t>
+              <a:t> Max drawdown capped under 13% during high-stress market regimes.</a:t>
             </a:r>
           </a:p>
           <a:p>
             <a:pPr>
               <a:spcAft>
-                <a:spcPts val="600"/>
+                <a:spcPts val="400"/>
               </a:spcAft>
             </a:pPr>
             <a:r>
-              <a:rPr b="1" sz="1050">
+              <a:rPr b="1" sz="1000">
                 <a:solidFill>
                   <a:srgbClr val="0F2043"/>
                 </a:solidFill>
               </a:rPr>
-              <a:t>• Controlled Drawdown Risk:</a:t>
+              <a:t>• High Sharpe Ratio: </a:t>
             </a:r>
             <a:r>
               <a:rPr sz="950">
@@ -5076,36 +5000,116 @@
                   <a:srgbClr val="1E293B"/>
                 </a:solidFill>
               </a:rPr>
-              <a:t>
-Max drawdown capped under 13% during severe market stress events (COVID 2020, Fed Rate Hikes 2022).</a:t>
-            </a:r>
-          </a:p>
-          <a:p>
-            <a:pPr>
-              <a:spcAft>
-                <a:spcPts val="600"/>
-              </a:spcAft>
-            </a:pPr>
-            <a:r>
-              <a:rPr b="1" sz="1050">
+              <a:t> Net Sharpe of 2.14 significantly outperforms S&amp;P 500 benchmark (0.75).</a:t>
+            </a:r>
+          </a:p>
+        </p:txBody>
+      </p:sp>
+      <p:sp>
+        <p:nvSpPr>
+          <p:cNvPr id="9" name="Rounded Rectangle 8"/>
+          <p:cNvSpPr/>
+          <p:nvPr/>
+        </p:nvSpPr>
+        <p:spPr>
+          <a:xfrm>
+            <a:off x="5943600" y="1371600"/>
+            <a:ext cx="5516575" cy="4846320"/>
+          </a:xfrm>
+          <a:prstGeom prst="roundRect">
+            <a:avLst/>
+          </a:prstGeom>
+          <a:solidFill>
+            <a:srgbClr val="FFFFFF"/>
+          </a:solidFill>
+          <a:ln w="19050">
+            <a:solidFill>
+              <a:srgbClr val="D4AF37"/>
+            </a:solidFill>
+          </a:ln>
+        </p:spPr>
+        <p:style>
+          <a:lnRef idx="1">
+            <a:schemeClr val="accent1"/>
+          </a:lnRef>
+          <a:fillRef idx="3">
+            <a:schemeClr val="accent1"/>
+          </a:fillRef>
+          <a:effectRef idx="2">
+            <a:schemeClr val="accent1"/>
+          </a:effectRef>
+          <a:fontRef idx="minor">
+            <a:schemeClr val="lt1"/>
+          </a:fontRef>
+        </p:style>
+        <p:txBody>
+          <a:bodyPr rtlCol="0" anchor="ctr"/>
+          <a:lstStyle/>
+          <a:p>
+            <a:pPr algn="ctr"/>
+          </a:p>
+        </p:txBody>
+      </p:sp>
+      <p:sp>
+        <p:nvSpPr>
+          <p:cNvPr id="10" name="TextBox 9"/>
+          <p:cNvSpPr txBox="1"/>
+          <p:nvPr/>
+        </p:nvSpPr>
+        <p:spPr>
+          <a:xfrm>
+            <a:off x="6080760" y="1463040"/>
+            <a:ext cx="5242255" cy="320040"/>
+          </a:xfrm>
+          <a:prstGeom prst="rect">
+            <a:avLst/>
+          </a:prstGeom>
+          <a:noFill/>
+        </p:spPr>
+        <p:txBody>
+          <a:bodyPr wrap="square" lIns="0" tIns="0" rIns="0" bIns="0">
+            <a:spAutoFit/>
+          </a:bodyPr>
+          <a:lstStyle/>
+          <a:p>
+            <a:pPr algn="ctr">
+              <a:defRPr sz="1100" b="1">
                 <a:solidFill>
                   <a:srgbClr val="0F2043"/>
                 </a:solidFill>
-              </a:rPr>
-              <a:t>• Superior Risk-Adjusted Return:</a:t>
-            </a:r>
-            <a:r>
-              <a:rPr sz="950">
-                <a:solidFill>
-                  <a:srgbClr val="1E293B"/>
-                </a:solidFill>
-              </a:rPr>
-              <a:t>
-Net Sharpe ratio of 2.14 under 10 bps fee friction significantly outperforms S&amp;P 500 benchmark (0.75).</a:t>
-            </a:r>
-          </a:p>
-        </p:txBody>
-      </p:sp>
+                <a:latin typeface="Arial"/>
+              </a:defRPr>
+            </a:pPr>
+            <a:r>
+              <a:t>Figure 4.5: Rolling Out-of-Sample Sharpe Ratio (10 bps Fee Friction)</a:t>
+            </a:r>
+          </a:p>
+        </p:txBody>
+      </p:sp>
+      <p:pic>
+        <p:nvPicPr>
+          <p:cNvPr id="11" name="Picture 10" descr="rolling_sharpe_21d_feattech_fund.png"/>
+          <p:cNvPicPr>
+            <a:picLocks noChangeAspect="1"/>
+          </p:cNvPicPr>
+          <p:nvPr/>
+        </p:nvPicPr>
+        <p:blipFill>
+          <a:blip r:embed="rId2"/>
+          <a:stretch>
+            <a:fillRect/>
+          </a:stretch>
+        </p:blipFill>
+        <p:spPr>
+          <a:xfrm>
+            <a:off x="6126480" y="2537177"/>
+            <a:ext cx="5150815" cy="2698045"/>
+          </a:xfrm>
+          <a:prstGeom prst="rect">
+            <a:avLst/>
+          </a:prstGeom>
+        </p:spPr>
+      </p:pic>
     </p:spTree>
   </p:cSld>
   <p:clrMapOvr>
@@ -5140,7 +5144,7 @@
         </p:nvSpPr>
         <p:spPr>
           <a:xfrm>
-            <a:off x="731520" y="365760"/>
+            <a:off x="731520" y="320040"/>
             <a:ext cx="10728655" cy="822960"/>
           </a:xfrm>
           <a:prstGeom prst="rect">
@@ -5171,7 +5175,7 @@
           </a:p>
           <a:p>
             <a:pPr>
-              <a:defRPr sz="2200" b="1">
+              <a:defRPr sz="2100" b="1">
                 <a:solidFill>
                   <a:srgbClr val="0F2043"/>
                 </a:solidFill>
@@ -5179,7 +5183,7 @@
               </a:defRPr>
             </a:pPr>
             <a:r>
-              <a:t>Academic Validation: Fama-French 5-Factor Spanning Proof</a:t>
+              <a:t>Academic Validation: Fama-French Spanning &amp; Drawdown Mitigation</a:t>
             </a:r>
           </a:p>
         </p:txBody>
@@ -5192,7 +5196,7 @@
         </p:nvSpPr>
         <p:spPr>
           <a:xfrm>
-            <a:off x="731520" y="1234440"/>
+            <a:off x="731520" y="1188720"/>
             <a:ext cx="10728655" cy="36576"/>
           </a:xfrm>
           <a:prstGeom prst="rect">
@@ -5236,7 +5240,7 @@
         <p:spPr>
           <a:xfrm>
             <a:off x="731520" y="6446520"/>
-            <a:ext cx="10728655" cy="320040"/>
+            <a:ext cx="8686800" cy="320040"/>
           </a:xfrm>
           <a:prstGeom prst="rect">
             <a:avLst/>
@@ -5259,19 +5263,6 @@
             </a:pPr>
             <a:r>
               <a:t>University of Verona | Department of Economics  •  Murtuza Yusuf Rangwala  •  Supervisor: Prof. Giuseppina Chesini</a:t>
-            </a:r>
-          </a:p>
-          <a:p>
-            <a:pPr algn="r">
-              <a:defRPr sz="900" b="1">
-                <a:solidFill>
-                  <a:srgbClr val="0F2043"/>
-                </a:solidFill>
-                <a:latin typeface="Calibri"/>
-              </a:defRPr>
-            </a:pPr>
-            <a:r>
-              <a:t>Slide 12 of 14</a:t>
             </a:r>
           </a:p>
         </p:txBody>
@@ -5321,8 +5312,8 @@
           <p:nvPr/>
         </p:nvGraphicFramePr>
         <p:xfrm>
-          <a:off x="731520" y="1463040"/>
-          <a:ext cx="6217920" cy="4663440"/>
+          <a:off x="731520" y="1371600"/>
+          <a:ext cx="4937760" cy="2651760"/>
         </p:xfrm>
         <a:graphic>
           <a:graphicData uri="http://schemas.openxmlformats.org/drawingml/2006/table">
@@ -5331,20 +5322,20 @@
                 <a:tableStyleId>{5C22544A-7EE6-4342-B048-85BDC9FD1C3A}</a:tableStyleId>
               </a:tblPr>
               <a:tblGrid>
-                <a:gridCol w="2011680"/>
-                <a:gridCol w="1051560"/>
-                <a:gridCol w="1051560"/>
-                <a:gridCol w="1051560"/>
-                <a:gridCol w="1051560"/>
+                <a:gridCol w="1645920"/>
+                <a:gridCol w="822960"/>
+                <a:gridCol w="822960"/>
+                <a:gridCol w="822960"/>
+                <a:gridCol w="822960"/>
               </a:tblGrid>
-              <a:tr h="582930">
+              <a:tr h="331470">
                 <a:tc>
                   <a:txBody>
                     <a:bodyPr/>
                     <a:lstStyle/>
                     <a:p>
                       <a:pPr algn="ctr">
-                        <a:defRPr sz="1100" b="1">
+                        <a:defRPr sz="1050" b="1">
                           <a:solidFill>
                             <a:srgbClr val="FFFFFF"/>
                           </a:solidFill>
@@ -5368,7 +5359,7 @@
                     <a:lstStyle/>
                     <a:p>
                       <a:pPr algn="ctr">
-                        <a:defRPr sz="1100" b="1">
+                        <a:defRPr sz="1050" b="1">
                           <a:solidFill>
                             <a:srgbClr val="FFFFFF"/>
                           </a:solidFill>
@@ -5392,7 +5383,7 @@
                     <a:lstStyle/>
                     <a:p>
                       <a:pPr algn="ctr">
-                        <a:defRPr sz="1100" b="1">
+                        <a:defRPr sz="1050" b="1">
                           <a:solidFill>
                             <a:srgbClr val="FFFFFF"/>
                           </a:solidFill>
@@ -5400,7 +5391,7 @@
                         </a:defRPr>
                       </a:pPr>
                       <a:r>
-                        <a:t>Std. Error</a:t>
+                        <a:t>Std. Err.</a:t>
                       </a:r>
                     </a:p>
                   </a:txBody>
@@ -5416,7 +5407,7 @@
                     <a:lstStyle/>
                     <a:p>
                       <a:pPr algn="ctr">
-                        <a:defRPr sz="1100" b="1">
+                        <a:defRPr sz="1050" b="1">
                           <a:solidFill>
                             <a:srgbClr val="FFFFFF"/>
                           </a:solidFill>
@@ -5424,7 +5415,7 @@
                         </a:defRPr>
                       </a:pPr>
                       <a:r>
-                        <a:t>t-statistic</a:t>
+                        <a:t>t-stat</a:t>
                       </a:r>
                     </a:p>
                   </a:txBody>
@@ -5440,7 +5431,7 @@
                     <a:lstStyle/>
                     <a:p>
                       <a:pPr algn="ctr">
-                        <a:defRPr sz="1100" b="1">
+                        <a:defRPr sz="1050" b="1">
                           <a:solidFill>
                             <a:srgbClr val="FFFFFF"/>
                           </a:solidFill>
@@ -5459,14 +5450,14 @@
                   </a:tcPr>
                 </a:tc>
               </a:tr>
-              <a:tr h="582930">
+              <a:tr h="331470">
                 <a:tc>
                   <a:txBody>
                     <a:bodyPr/>
                     <a:lstStyle/>
                     <a:p>
                       <a:pPr algn="l">
-                        <a:defRPr sz="1050" b="1">
+                        <a:defRPr sz="1000" b="1">
                           <a:solidFill>
                             <a:srgbClr val="0F2043"/>
                           </a:solidFill>
@@ -5490,7 +5481,7 @@
                     <a:lstStyle/>
                     <a:p>
                       <a:pPr algn="ctr">
-                        <a:defRPr sz="1050">
+                        <a:defRPr sz="1000">
                           <a:solidFill>
                             <a:srgbClr val="1E293B"/>
                           </a:solidFill>
@@ -5514,7 +5505,7 @@
                     <a:lstStyle/>
                     <a:p>
                       <a:pPr algn="ctr">
-                        <a:defRPr sz="1050">
+                        <a:defRPr sz="1000">
                           <a:solidFill>
                             <a:srgbClr val="1E293B"/>
                           </a:solidFill>
@@ -5538,7 +5529,7 @@
                     <a:lstStyle/>
                     <a:p>
                       <a:pPr algn="ctr">
-                        <a:defRPr sz="1050">
+                        <a:defRPr sz="1000">
                           <a:solidFill>
                             <a:srgbClr val="1E293B"/>
                           </a:solidFill>
@@ -5562,7 +5553,7 @@
                     <a:lstStyle/>
                     <a:p>
                       <a:pPr algn="ctr">
-                        <a:defRPr sz="1050">
+                        <a:defRPr sz="1000">
                           <a:solidFill>
                             <a:srgbClr val="1E293B"/>
                           </a:solidFill>
@@ -5581,14 +5572,14 @@
                   </a:tcPr>
                 </a:tc>
               </a:tr>
-              <a:tr h="582930">
+              <a:tr h="331470">
                 <a:tc>
                   <a:txBody>
                     <a:bodyPr/>
                     <a:lstStyle/>
                     <a:p>
                       <a:pPr algn="l">
-                        <a:defRPr sz="1050" b="1">
+                        <a:defRPr sz="1000" b="1">
                           <a:solidFill>
                             <a:srgbClr val="0F2043"/>
                           </a:solidFill>
@@ -5612,7 +5603,7 @@
                     <a:lstStyle/>
                     <a:p>
                       <a:pPr algn="ctr">
-                        <a:defRPr sz="1050">
+                        <a:defRPr sz="1000">
                           <a:solidFill>
                             <a:srgbClr val="1E293B"/>
                           </a:solidFill>
@@ -5636,7 +5627,7 @@
                     <a:lstStyle/>
                     <a:p>
                       <a:pPr algn="ctr">
-                        <a:defRPr sz="1050">
+                        <a:defRPr sz="1000">
                           <a:solidFill>
                             <a:srgbClr val="1E293B"/>
                           </a:solidFill>
@@ -5660,7 +5651,7 @@
                     <a:lstStyle/>
                     <a:p>
                       <a:pPr algn="ctr">
-                        <a:defRPr sz="1050">
+                        <a:defRPr sz="1000">
                           <a:solidFill>
                             <a:srgbClr val="1E293B"/>
                           </a:solidFill>
@@ -5684,7 +5675,7 @@
                     <a:lstStyle/>
                     <a:p>
                       <a:pPr algn="ctr">
-                        <a:defRPr sz="1050">
+                        <a:defRPr sz="1000">
                           <a:solidFill>
                             <a:srgbClr val="1E293B"/>
                           </a:solidFill>
@@ -5703,14 +5694,14 @@
                   </a:tcPr>
                 </a:tc>
               </a:tr>
-              <a:tr h="582930">
+              <a:tr h="331470">
                 <a:tc>
                   <a:txBody>
                     <a:bodyPr/>
                     <a:lstStyle/>
                     <a:p>
                       <a:pPr algn="l">
-                        <a:defRPr sz="1050" b="1">
+                        <a:defRPr sz="1000" b="1">
                           <a:solidFill>
                             <a:srgbClr val="0F2043"/>
                           </a:solidFill>
@@ -5734,7 +5725,7 @@
                     <a:lstStyle/>
                     <a:p>
                       <a:pPr algn="ctr">
-                        <a:defRPr sz="1050">
+                        <a:defRPr sz="1000">
                           <a:solidFill>
                             <a:srgbClr val="1E293B"/>
                           </a:solidFill>
@@ -5758,7 +5749,7 @@
                     <a:lstStyle/>
                     <a:p>
                       <a:pPr algn="ctr">
-                        <a:defRPr sz="1050">
+                        <a:defRPr sz="1000">
                           <a:solidFill>
                             <a:srgbClr val="1E293B"/>
                           </a:solidFill>
@@ -5782,7 +5773,7 @@
                     <a:lstStyle/>
                     <a:p>
                       <a:pPr algn="ctr">
-                        <a:defRPr sz="1050">
+                        <a:defRPr sz="1000">
                           <a:solidFill>
                             <a:srgbClr val="1E293B"/>
                           </a:solidFill>
@@ -5806,7 +5797,7 @@
                     <a:lstStyle/>
                     <a:p>
                       <a:pPr algn="ctr">
-                        <a:defRPr sz="1050">
+                        <a:defRPr sz="1000">
                           <a:solidFill>
                             <a:srgbClr val="1E293B"/>
                           </a:solidFill>
@@ -5825,14 +5816,14 @@
                   </a:tcPr>
                 </a:tc>
               </a:tr>
-              <a:tr h="582930">
+              <a:tr h="331470">
                 <a:tc>
                   <a:txBody>
                     <a:bodyPr/>
                     <a:lstStyle/>
                     <a:p>
                       <a:pPr algn="l">
-                        <a:defRPr sz="1050" b="1">
+                        <a:defRPr sz="1000" b="1">
                           <a:solidFill>
                             <a:srgbClr val="0F2043"/>
                           </a:solidFill>
@@ -5856,7 +5847,7 @@
                     <a:lstStyle/>
                     <a:p>
                       <a:pPr algn="ctr">
-                        <a:defRPr sz="1050">
+                        <a:defRPr sz="1000">
                           <a:solidFill>
                             <a:srgbClr val="1E293B"/>
                           </a:solidFill>
@@ -5880,7 +5871,7 @@
                     <a:lstStyle/>
                     <a:p>
                       <a:pPr algn="ctr">
-                        <a:defRPr sz="1050">
+                        <a:defRPr sz="1000">
                           <a:solidFill>
                             <a:srgbClr val="1E293B"/>
                           </a:solidFill>
@@ -5904,7 +5895,7 @@
                     <a:lstStyle/>
                     <a:p>
                       <a:pPr algn="ctr">
-                        <a:defRPr sz="1050">
+                        <a:defRPr sz="1000">
                           <a:solidFill>
                             <a:srgbClr val="1E293B"/>
                           </a:solidFill>
@@ -5928,7 +5919,7 @@
                     <a:lstStyle/>
                     <a:p>
                       <a:pPr algn="ctr">
-                        <a:defRPr sz="1050">
+                        <a:defRPr sz="1000">
                           <a:solidFill>
                             <a:srgbClr val="1E293B"/>
                           </a:solidFill>
@@ -5947,14 +5938,14 @@
                   </a:tcPr>
                 </a:tc>
               </a:tr>
-              <a:tr h="582930">
+              <a:tr h="331470">
                 <a:tc>
                   <a:txBody>
                     <a:bodyPr/>
                     <a:lstStyle/>
                     <a:p>
                       <a:pPr algn="l">
-                        <a:defRPr sz="1050" b="1">
+                        <a:defRPr sz="1000" b="1">
                           <a:solidFill>
                             <a:srgbClr val="0F2043"/>
                           </a:solidFill>
@@ -5978,7 +5969,7 @@
                     <a:lstStyle/>
                     <a:p>
                       <a:pPr algn="ctr">
-                        <a:defRPr sz="1050">
+                        <a:defRPr sz="1000">
                           <a:solidFill>
                             <a:srgbClr val="1E293B"/>
                           </a:solidFill>
@@ -6002,7 +5993,7 @@
                     <a:lstStyle/>
                     <a:p>
                       <a:pPr algn="ctr">
-                        <a:defRPr sz="1050">
+                        <a:defRPr sz="1000">
                           <a:solidFill>
                             <a:srgbClr val="1E293B"/>
                           </a:solidFill>
@@ -6026,7 +6017,7 @@
                     <a:lstStyle/>
                     <a:p>
                       <a:pPr algn="ctr">
-                        <a:defRPr sz="1050">
+                        <a:defRPr sz="1000">
                           <a:solidFill>
                             <a:srgbClr val="1E293B"/>
                           </a:solidFill>
@@ -6050,7 +6041,7 @@
                     <a:lstStyle/>
                     <a:p>
                       <a:pPr algn="ctr">
-                        <a:defRPr sz="1050">
+                        <a:defRPr sz="1000">
                           <a:solidFill>
                             <a:srgbClr val="1E293B"/>
                           </a:solidFill>
@@ -6069,14 +6060,14 @@
                   </a:tcPr>
                 </a:tc>
               </a:tr>
-              <a:tr h="582930">
+              <a:tr h="331470">
                 <a:tc>
                   <a:txBody>
                     <a:bodyPr/>
                     <a:lstStyle/>
                     <a:p>
                       <a:pPr algn="l">
-                        <a:defRPr sz="1050" b="1">
+                        <a:defRPr sz="1000" b="1">
                           <a:solidFill>
                             <a:srgbClr val="0F2043"/>
                           </a:solidFill>
@@ -6100,7 +6091,7 @@
                     <a:lstStyle/>
                     <a:p>
                       <a:pPr algn="ctr">
-                        <a:defRPr sz="1050">
+                        <a:defRPr sz="1000">
                           <a:solidFill>
                             <a:srgbClr val="1E293B"/>
                           </a:solidFill>
@@ -6124,7 +6115,7 @@
                     <a:lstStyle/>
                     <a:p>
                       <a:pPr algn="ctr">
-                        <a:defRPr sz="1050">
+                        <a:defRPr sz="1000">
                           <a:solidFill>
                             <a:srgbClr val="1E293B"/>
                           </a:solidFill>
@@ -6148,7 +6139,7 @@
                     <a:lstStyle/>
                     <a:p>
                       <a:pPr algn="ctr">
-                        <a:defRPr sz="1050">
+                        <a:defRPr sz="1000">
                           <a:solidFill>
                             <a:srgbClr val="1E293B"/>
                           </a:solidFill>
@@ -6172,7 +6163,7 @@
                     <a:lstStyle/>
                     <a:p>
                       <a:pPr algn="ctr">
-                        <a:defRPr sz="1050">
+                        <a:defRPr sz="1000">
                           <a:solidFill>
                             <a:srgbClr val="1E293B"/>
                           </a:solidFill>
@@ -6191,14 +6182,14 @@
                   </a:tcPr>
                 </a:tc>
               </a:tr>
-              <a:tr h="582930">
+              <a:tr h="331470">
                 <a:tc>
                   <a:txBody>
                     <a:bodyPr/>
                     <a:lstStyle/>
                     <a:p>
                       <a:pPr algn="l">
-                        <a:defRPr sz="1050" b="1">
+                        <a:defRPr sz="1000" b="1">
                           <a:solidFill>
                             <a:srgbClr val="0F2043"/>
                           </a:solidFill>
@@ -6222,7 +6213,7 @@
                     <a:lstStyle/>
                     <a:p>
                       <a:pPr algn="ctr">
-                        <a:defRPr sz="1050">
+                        <a:defRPr sz="1000">
                           <a:solidFill>
                             <a:srgbClr val="1E293B"/>
                           </a:solidFill>
@@ -6246,7 +6237,7 @@
                     <a:lstStyle/>
                     <a:p>
                       <a:pPr algn="ctr">
-                        <a:defRPr sz="1050">
+                        <a:defRPr sz="1000">
                           <a:solidFill>
                             <a:srgbClr val="1E293B"/>
                           </a:solidFill>
@@ -6270,7 +6261,7 @@
                     <a:lstStyle/>
                     <a:p>
                       <a:pPr algn="ctr">
-                        <a:defRPr sz="1050">
+                        <a:defRPr sz="1000">
                           <a:solidFill>
                             <a:srgbClr val="1E293B"/>
                           </a:solidFill>
@@ -6294,7 +6285,7 @@
                     <a:lstStyle/>
                     <a:p>
                       <a:pPr algn="ctr">
-                        <a:defRPr sz="1050">
+                        <a:defRPr sz="1000">
                           <a:solidFill>
                             <a:srgbClr val="1E293B"/>
                           </a:solidFill>
@@ -6325,8 +6316,8 @@
         </p:nvSpPr>
         <p:spPr>
           <a:xfrm>
-            <a:off x="7223760" y="1463040"/>
-            <a:ext cx="4236415" cy="4663440"/>
+            <a:off x="731520" y="4160520"/>
+            <a:ext cx="4937760" cy="2057400"/>
           </a:xfrm>
           <a:prstGeom prst="roundRect">
             <a:avLst/>
@@ -6370,8 +6361,8 @@
         </p:nvSpPr>
         <p:spPr>
           <a:xfrm>
-            <a:off x="7406640" y="1645920"/>
-            <a:ext cx="3870655" cy="4297680"/>
+            <a:off x="914400" y="4297680"/>
+            <a:ext cx="4572000" cy="1783080"/>
           </a:xfrm>
           <a:prstGeom prst="rect">
             <a:avLst/>
@@ -6386,9 +6377,9 @@
           <a:p>
             <a:pPr>
               <a:spcAft>
-                <a:spcPts val="800"/>
+                <a:spcPts val="400"/>
               </a:spcAft>
-              <a:defRPr sz="1400" b="1">
+              <a:defRPr sz="1250" b="1">
                 <a:solidFill>
                   <a:srgbClr val="0F2043"/>
                 </a:solidFill>
@@ -6402,16 +6393,16 @@
           <a:p>
             <a:pPr>
               <a:spcAft>
-                <a:spcPts val="600"/>
+                <a:spcPts val="400"/>
               </a:spcAft>
             </a:pPr>
             <a:r>
-              <a:rPr b="1" sz="1050">
+              <a:rPr b="1" sz="1000">
                 <a:solidFill>
                   <a:srgbClr val="A51C30"/>
                 </a:solidFill>
               </a:rPr>
-              <a:t>• Zero Statistically Significant Alpha:</a:t>
+              <a:t>• Zero Abnormal Alpha: </a:t>
             </a:r>
             <a:r>
               <a:rPr sz="950">
@@ -6419,23 +6410,22 @@
                   <a:srgbClr val="1E293B"/>
                 </a:solidFill>
               </a:rPr>
-              <a:t>
-Intercept is -0.18% (p = 0.976), proving that strategy returns contain zero unpriced abnormal alpha.</a:t>
+              <a:t> Intercept is -0.18% (p = 0.976), proving zero unpriced alpha.</a:t>
             </a:r>
           </a:p>
           <a:p>
             <a:pPr>
               <a:spcAft>
-                <a:spcPts val="600"/>
+                <a:spcPts val="400"/>
               </a:spcAft>
             </a:pPr>
             <a:r>
-              <a:rPr b="1" sz="1050">
+              <a:rPr b="1" sz="1000">
                 <a:solidFill>
                   <a:srgbClr val="A51C30"/>
                 </a:solidFill>
               </a:rPr>
-              <a:t>• Strict EMH Compliance:</a:t>
+              <a:t>• Strict EMH Compliance: </a:t>
             </a:r>
             <a:r>
               <a:rPr sz="950">
@@ -6443,23 +6433,22 @@
                   <a:srgbClr val="1E293B"/>
                 </a:solidFill>
               </a:rPr>
-              <a:t>
-The strategy's excess returns are fully spanned by systematic risk factor loadings (Market β = +0.852, RMW β = +0.512).</a:t>
+              <a:t> Excess returns spanned by Market (+0.852) &amp; Profitability (+0.512).</a:t>
             </a:r>
           </a:p>
           <a:p>
             <a:pPr>
               <a:spcAft>
-                <a:spcPts val="600"/>
+                <a:spcPts val="400"/>
               </a:spcAft>
             </a:pPr>
             <a:r>
-              <a:rPr b="1" sz="1050">
+              <a:rPr b="1" sz="1000">
                 <a:solidFill>
                   <a:srgbClr val="A51C30"/>
                 </a:solidFill>
               </a:rPr>
-              <a:t>• Profitability Factor Tilt:</a:t>
+              <a:t>• Systemic Risk Harvesting: </a:t>
             </a:r>
             <a:r>
               <a:rPr sz="950">
@@ -6467,36 +6456,116 @@
                   <a:srgbClr val="1E293B"/>
                 </a:solidFill>
               </a:rPr>
-              <a:t>
-Strong positive loading on RMW (+0.512, p &lt; 0.001) confirms the model systematically targets high-quality, high-profitability firms.</a:t>
-            </a:r>
-          </a:p>
-          <a:p>
-            <a:pPr>
-              <a:spcAft>
-                <a:spcPts val="600"/>
-              </a:spcAft>
-            </a:pPr>
-            <a:r>
-              <a:rPr b="1" sz="1050">
-                <a:solidFill>
-                  <a:srgbClr val="A51C30"/>
-                </a:solidFill>
-              </a:rPr>
-              <a:t>• Academic Significance:</a:t>
-            </a:r>
-            <a:r>
-              <a:rPr sz="950">
-                <a:solidFill>
-                  <a:srgbClr val="1E293B"/>
-                </a:solidFill>
-              </a:rPr>
-              <a:t>
-Proves that deep learning models harvest systemic risk compensation rather than violating market efficiency.</a:t>
-            </a:r>
-          </a:p>
-        </p:txBody>
-      </p:sp>
+              <a:t> Deep network extracts known risk factors without market inefficiency.</a:t>
+            </a:r>
+          </a:p>
+        </p:txBody>
+      </p:sp>
+      <p:sp>
+        <p:nvSpPr>
+          <p:cNvPr id="9" name="Rounded Rectangle 8"/>
+          <p:cNvSpPr/>
+          <p:nvPr/>
+        </p:nvSpPr>
+        <p:spPr>
+          <a:xfrm>
+            <a:off x="5943600" y="1371600"/>
+            <a:ext cx="5516575" cy="4846320"/>
+          </a:xfrm>
+          <a:prstGeom prst="roundRect">
+            <a:avLst/>
+          </a:prstGeom>
+          <a:solidFill>
+            <a:srgbClr val="FFFFFF"/>
+          </a:solidFill>
+          <a:ln w="19050">
+            <a:solidFill>
+              <a:srgbClr val="D4AF37"/>
+            </a:solidFill>
+          </a:ln>
+        </p:spPr>
+        <p:style>
+          <a:lnRef idx="1">
+            <a:schemeClr val="accent1"/>
+          </a:lnRef>
+          <a:fillRef idx="3">
+            <a:schemeClr val="accent1"/>
+          </a:fillRef>
+          <a:effectRef idx="2">
+            <a:schemeClr val="accent1"/>
+          </a:effectRef>
+          <a:fontRef idx="minor">
+            <a:schemeClr val="lt1"/>
+          </a:fontRef>
+        </p:style>
+        <p:txBody>
+          <a:bodyPr rtlCol="0" anchor="ctr"/>
+          <a:lstStyle/>
+          <a:p>
+            <a:pPr algn="ctr"/>
+          </a:p>
+        </p:txBody>
+      </p:sp>
+      <p:sp>
+        <p:nvSpPr>
+          <p:cNvPr id="10" name="TextBox 9"/>
+          <p:cNvSpPr txBox="1"/>
+          <p:nvPr/>
+        </p:nvSpPr>
+        <p:spPr>
+          <a:xfrm>
+            <a:off x="6080760" y="1463040"/>
+            <a:ext cx="5242255" cy="320040"/>
+          </a:xfrm>
+          <a:prstGeom prst="rect">
+            <a:avLst/>
+          </a:prstGeom>
+          <a:noFill/>
+        </p:spPr>
+        <p:txBody>
+          <a:bodyPr wrap="square" lIns="0" tIns="0" rIns="0" bIns="0">
+            <a:spAutoFit/>
+          </a:bodyPr>
+          <a:lstStyle/>
+          <a:p>
+            <a:pPr algn="ctr">
+              <a:defRPr sz="1100" b="1">
+                <a:solidFill>
+                  <a:srgbClr val="0F2043"/>
+                </a:solidFill>
+                <a:latin typeface="Arial"/>
+              </a:defRPr>
+            </a:pPr>
+            <a:r>
+              <a:t>Figure 4.7: Macro Gating Stress Drawdown Mitigation (2020 COVID &amp; 2022 Fed Hikes)</a:t>
+            </a:r>
+          </a:p>
+        </p:txBody>
+      </p:sp>
+      <p:pic>
+        <p:nvPicPr>
+          <p:cNvPr id="11" name="Picture 10" descr="stress_drawdown_mitigation.png"/>
+          <p:cNvPicPr>
+            <a:picLocks noChangeAspect="1"/>
+          </p:cNvPicPr>
+          <p:nvPr/>
+        </p:nvPicPr>
+        <p:blipFill>
+          <a:blip r:embed="rId2"/>
+          <a:stretch>
+            <a:fillRect/>
+          </a:stretch>
+        </p:blipFill>
+        <p:spPr>
+          <a:xfrm>
+            <a:off x="6126480" y="2598496"/>
+            <a:ext cx="5150815" cy="2575407"/>
+          </a:xfrm>
+          <a:prstGeom prst="rect">
+            <a:avLst/>
+          </a:prstGeom>
+        </p:spPr>
+      </p:pic>
     </p:spTree>
   </p:cSld>
   <p:clrMapOvr>
@@ -6531,7 +6600,7 @@
         </p:nvSpPr>
         <p:spPr>
           <a:xfrm>
-            <a:off x="731520" y="365760"/>
+            <a:off x="731520" y="320040"/>
             <a:ext cx="10728655" cy="822960"/>
           </a:xfrm>
           <a:prstGeom prst="rect">
@@ -6562,7 +6631,7 @@
           </a:p>
           <a:p>
             <a:pPr>
-              <a:defRPr sz="2200" b="1">
+              <a:defRPr sz="2100" b="1">
                 <a:solidFill>
                   <a:srgbClr val="0F2043"/>
                 </a:solidFill>
@@ -6583,7 +6652,7 @@
         </p:nvSpPr>
         <p:spPr>
           <a:xfrm>
-            <a:off x="731520" y="1234440"/>
+            <a:off x="731520" y="1188720"/>
             <a:ext cx="10728655" cy="36576"/>
           </a:xfrm>
           <a:prstGeom prst="rect">
@@ -6627,7 +6696,7 @@
         <p:spPr>
           <a:xfrm>
             <a:off x="731520" y="6446520"/>
-            <a:ext cx="10728655" cy="320040"/>
+            <a:ext cx="8686800" cy="320040"/>
           </a:xfrm>
           <a:prstGeom prst="rect">
             <a:avLst/>
@@ -6652,19 +6721,6 @@
               <a:t>University of Verona | Department of Economics  •  Murtuza Yusuf Rangwala  •  Supervisor: Prof. Giuseppina Chesini</a:t>
             </a:r>
           </a:p>
-          <a:p>
-            <a:pPr algn="r">
-              <a:defRPr sz="900" b="1">
-                <a:solidFill>
-                  <a:srgbClr val="0F2043"/>
-                </a:solidFill>
-                <a:latin typeface="Calibri"/>
-              </a:defRPr>
-            </a:pPr>
-            <a:r>
-              <a:t>Slide 13 of 14</a:t>
-            </a:r>
-          </a:p>
         </p:txBody>
       </p:sp>
       <p:sp>
@@ -6711,8 +6767,8 @@
         </p:nvSpPr>
         <p:spPr>
           <a:xfrm>
-            <a:off x="731520" y="1463040"/>
-            <a:ext cx="3383280" cy="1371600"/>
+            <a:off x="731520" y="1371600"/>
+            <a:ext cx="3383280" cy="1280160"/>
           </a:xfrm>
           <a:prstGeom prst="roundRect">
             <a:avLst/>
@@ -6756,8 +6812,8 @@
         </p:nvSpPr>
         <p:spPr>
           <a:xfrm>
-            <a:off x="868680" y="1600200"/>
-            <a:ext cx="3108960" cy="1097280"/>
+            <a:off x="868680" y="1508760"/>
+            <a:ext cx="3108960" cy="1005840"/>
           </a:xfrm>
           <a:prstGeom prst="rect">
             <a:avLst/>
@@ -6771,7 +6827,7 @@
           <a:lstStyle/>
           <a:p>
             <a:pPr algn="ctr">
-              <a:defRPr sz="2800" b="1">
+              <a:defRPr sz="2600" b="1">
                 <a:solidFill>
                   <a:srgbClr val="0F2043"/>
                 </a:solidFill>
@@ -6785,9 +6841,9 @@
           <a:p>
             <a:pPr algn="ctr">
               <a:spcBef>
-                <a:spcPts val="400"/>
+                <a:spcPts val="300"/>
               </a:spcBef>
-              <a:defRPr sz="1100" b="1">
+              <a:defRPr sz="1050" b="1">
                 <a:solidFill>
                   <a:srgbClr val="1E293B"/>
                 </a:solidFill>
@@ -6803,7 +6859,7 @@
               <a:spcBef>
                 <a:spcPts val="200"/>
               </a:spcBef>
-              <a:defRPr sz="950">
+              <a:defRPr sz="900">
                 <a:solidFill>
                   <a:srgbClr val="64748B"/>
                 </a:solidFill>
@@ -6824,8 +6880,8 @@
         </p:nvSpPr>
         <p:spPr>
           <a:xfrm>
-            <a:off x="4398264" y="1463040"/>
-            <a:ext cx="3383280" cy="1371600"/>
+            <a:off x="4398264" y="1371600"/>
+            <a:ext cx="3383280" cy="1280160"/>
           </a:xfrm>
           <a:prstGeom prst="roundRect">
             <a:avLst/>
@@ -6869,8 +6925,8 @@
         </p:nvSpPr>
         <p:spPr>
           <a:xfrm>
-            <a:off x="4535424" y="1600200"/>
-            <a:ext cx="3108960" cy="1097280"/>
+            <a:off x="4535424" y="1508760"/>
+            <a:ext cx="3108960" cy="1005840"/>
           </a:xfrm>
           <a:prstGeom prst="rect">
             <a:avLst/>
@@ -6884,7 +6940,7 @@
           <a:lstStyle/>
           <a:p>
             <a:pPr algn="ctr">
-              <a:defRPr sz="2800" b="1">
+              <a:defRPr sz="2600" b="1">
                 <a:solidFill>
                   <a:srgbClr val="166534"/>
                 </a:solidFill>
@@ -6898,9 +6954,9 @@
           <a:p>
             <a:pPr algn="ctr">
               <a:spcBef>
-                <a:spcPts val="400"/>
+                <a:spcPts val="300"/>
               </a:spcBef>
-              <a:defRPr sz="1100" b="1">
+              <a:defRPr sz="1050" b="1">
                 <a:solidFill>
                   <a:srgbClr val="1E293B"/>
                 </a:solidFill>
@@ -6916,7 +6972,7 @@
               <a:spcBef>
                 <a:spcPts val="200"/>
               </a:spcBef>
-              <a:defRPr sz="950">
+              <a:defRPr sz="900">
                 <a:solidFill>
                   <a:srgbClr val="64748B"/>
                 </a:solidFill>
@@ -6937,8 +6993,8 @@
         </p:nvSpPr>
         <p:spPr>
           <a:xfrm>
-            <a:off x="8065008" y="1463040"/>
-            <a:ext cx="3383280" cy="1371600"/>
+            <a:off x="8065008" y="1371600"/>
+            <a:ext cx="3383280" cy="1280160"/>
           </a:xfrm>
           <a:prstGeom prst="roundRect">
             <a:avLst/>
@@ -6982,8 +7038,8 @@
         </p:nvSpPr>
         <p:spPr>
           <a:xfrm>
-            <a:off x="8202168" y="1600200"/>
-            <a:ext cx="3108960" cy="1097280"/>
+            <a:off x="8202168" y="1508760"/>
+            <a:ext cx="3108960" cy="1005840"/>
           </a:xfrm>
           <a:prstGeom prst="rect">
             <a:avLst/>
@@ -6997,7 +7053,7 @@
           <a:lstStyle/>
           <a:p>
             <a:pPr algn="ctr">
-              <a:defRPr sz="2800" b="1">
+              <a:defRPr sz="2600" b="1">
                 <a:solidFill>
                   <a:srgbClr val="A51C30"/>
                 </a:solidFill>
@@ -7011,9 +7067,9 @@
           <a:p>
             <a:pPr algn="ctr">
               <a:spcBef>
-                <a:spcPts val="400"/>
+                <a:spcPts val="300"/>
               </a:spcBef>
-              <a:defRPr sz="1100" b="1">
+              <a:defRPr sz="1050" b="1">
                 <a:solidFill>
                   <a:srgbClr val="1E293B"/>
                 </a:solidFill>
@@ -7029,7 +7085,7 @@
               <a:spcBef>
                 <a:spcPts val="200"/>
               </a:spcBef>
-              <a:defRPr sz="950">
+              <a:defRPr sz="900">
                 <a:solidFill>
                   <a:srgbClr val="64748B"/>
                 </a:solidFill>
@@ -7050,8 +7106,8 @@
         </p:nvSpPr>
         <p:spPr>
           <a:xfrm>
-            <a:off x="731520" y="3063240"/>
-            <a:ext cx="5212080" cy="3154680"/>
+            <a:off x="731520" y="2834640"/>
+            <a:ext cx="5120640" cy="3383280"/>
           </a:xfrm>
           <a:prstGeom prst="roundRect">
             <a:avLst/>
@@ -7095,8 +7151,8 @@
         </p:nvSpPr>
         <p:spPr>
           <a:xfrm>
-            <a:off x="914400" y="3246120"/>
-            <a:ext cx="4846320" cy="2788920"/>
+            <a:off x="914400" y="2971800"/>
+            <a:ext cx="4754880" cy="3108960"/>
           </a:xfrm>
           <a:prstGeom prst="rect">
             <a:avLst/>
@@ -7111,27 +7167,27 @@
           <a:p>
             <a:pPr>
               <a:spcAft>
-                <a:spcPts val="800"/>
-              </a:spcAft>
-              <a:defRPr sz="1400" b="1">
-                <a:solidFill>
-                  <a:srgbClr val="0F2043"/>
-                </a:solidFill>
-                <a:latin typeface="Arial"/>
-              </a:defRPr>
-            </a:pPr>
-            <a:r>
-              <a:t>Cloud Infrastructure &amp; Execution Engine</a:t>
-            </a:r>
-          </a:p>
-          <a:p>
-            <a:pPr>
-              <a:spcAft>
                 <a:spcPts val="600"/>
               </a:spcAft>
-            </a:pPr>
-            <a:r>
-              <a:rPr b="1" sz="1050">
+              <a:defRPr sz="1300" b="1">
+                <a:solidFill>
+                  <a:srgbClr val="0F2043"/>
+                </a:solidFill>
+                <a:latin typeface="Arial"/>
+              </a:defRPr>
+            </a:pPr>
+            <a:r>
+              <a:t>Cloud Infrastructure &amp; Options Strategy</a:t>
+            </a:r>
+          </a:p>
+          <a:p>
+            <a:pPr>
+              <a:spcAft>
+                <a:spcPts val="500"/>
+              </a:spcAft>
+            </a:pPr>
+            <a:r>
+              <a:rPr b="1" sz="1000">
                 <a:solidFill>
                   <a:srgbClr val="0F2043"/>
                 </a:solidFill>
@@ -7139,58 +7195,81 @@
               <a:t>• GitHub Actions Cloud Runner: </a:t>
             </a:r>
             <a:r>
-              <a:rPr sz="1000">
+              <a:rPr sz="950">
                 <a:solidFill>
                   <a:srgbClr val="1E293B"/>
                 </a:solidFill>
               </a:rPr>
-              <a:t> Automated cron scheduler triggering execution every trading day at 09:30 EST.</a:t>
+              <a:t> Automated 24/7 cron scheduler executing every trading day at 09:30 EST.</a:t>
             </a:r>
           </a:p>
           <a:p>
             <a:pPr>
               <a:spcAft>
-                <a:spcPts val="600"/>
+                <a:spcPts val="500"/>
               </a:spcAft>
             </a:pPr>
             <a:r>
-              <a:rPr b="1" sz="1050">
+              <a:rPr b="1" sz="1000">
                 <a:solidFill>
                   <a:srgbClr val="0F2043"/>
                 </a:solidFill>
               </a:rPr>
-              <a:t>• Alpaca Trading REST API: </a:t>
-            </a:r>
-            <a:r>
-              <a:rPr sz="1000">
+              <a:t>• Alpaca Brokerage REST API: </a:t>
+            </a:r>
+            <a:r>
+              <a:rPr sz="950">
                 <a:solidFill>
                   <a:srgbClr val="1E293B"/>
                 </a:solidFill>
               </a:rPr>
-              <a:t> Direct integration via `alpaca-py` for order placement, position query, and equity tracking.</a:t>
+              <a:t> Integrated via `alpaca-py` for automated order placement, position sizing, and margin tracking.</a:t>
             </a:r>
           </a:p>
           <a:p>
             <a:pPr>
               <a:spcAft>
-                <a:spcPts val="600"/>
+                <a:spcPts val="500"/>
               </a:spcAft>
             </a:pPr>
             <a:r>
-              <a:rPr b="1" sz="1050">
+              <a:rPr b="1" sz="1000">
                 <a:solidFill>
                   <a:srgbClr val="0F2043"/>
                 </a:solidFill>
               </a:rPr>
-              <a:t>• Zero-Downtime Deployment: </a:t>
-            </a:r>
-            <a:r>
-              <a:rPr sz="1000">
+              <a:t>• ATM Contract Screener: </a:t>
+            </a:r>
+            <a:r>
+              <a:rPr sz="950">
                 <a:solidFill>
                   <a:srgbClr val="1E293B"/>
                 </a:solidFill>
               </a:rPr>
-              <a:t> Continuous cloud runner monitoring market status, order execution, and error handling.</a:t>
+              <a:t> Buys At-The-Money (ATM) Calls for Top Decile predictions and ATM Puts for Bottom Decile.</a:t>
+            </a:r>
+          </a:p>
+          <a:p>
+            <a:pPr>
+              <a:spcAft>
+                <a:spcPts val="500"/>
+              </a:spcAft>
+            </a:pPr>
+            <a:r>
+              <a:rPr b="1" sz="1000">
+                <a:solidFill>
+                  <a:srgbClr val="0F2043"/>
+                </a:solidFill>
+              </a:rPr>
+              <a:t>• Automated Circuit Breaker: </a:t>
+            </a:r>
+            <a:r>
+              <a:rPr sz="950">
+                <a:solidFill>
+                  <a:srgbClr val="1E293B"/>
+                </a:solidFill>
+              </a:rPr>
+              <a:t> Real-time daily monitoring of 2:1 TPSL (+4% profit target / -2% stop-loss) across active contracts.</a:t>
             </a:r>
           </a:p>
         </p:txBody>
@@ -7203,14 +7282,14 @@
         </p:nvSpPr>
         <p:spPr>
           <a:xfrm>
-            <a:off x="6245352" y="3063240"/>
-            <a:ext cx="5212080" cy="3154680"/>
+            <a:off x="6126480" y="2834640"/>
+            <a:ext cx="5333695" cy="3383280"/>
           </a:xfrm>
           <a:prstGeom prst="roundRect">
             <a:avLst/>
           </a:prstGeom>
           <a:solidFill>
-            <a:srgbClr val="FFFFFF"/>
+            <a:srgbClr val="0D1117"/>
           </a:solidFill>
           <a:ln w="19050">
             <a:solidFill>
@@ -7248,8 +7327,8 @@
         </p:nvSpPr>
         <p:spPr>
           <a:xfrm>
-            <a:off x="6428232" y="3246120"/>
-            <a:ext cx="4846320" cy="2788920"/>
+            <a:off x="6263640" y="2971800"/>
+            <a:ext cx="5059375" cy="3108960"/>
           </a:xfrm>
           <a:prstGeom prst="rect">
             <a:avLst/>
@@ -7264,86 +7343,177 @@
           <a:p>
             <a:pPr>
               <a:spcAft>
-                <a:spcPts val="800"/>
-              </a:spcAft>
-              <a:defRPr sz="1400" b="1">
-                <a:solidFill>
-                  <a:srgbClr val="A51C30"/>
-                </a:solidFill>
-                <a:latin typeface="Arial"/>
-              </a:defRPr>
-            </a:pPr>
-            <a:r>
-              <a:t>Option Screener &amp; Dynamic Order Management</a:t>
-            </a:r>
-          </a:p>
-          <a:p>
-            <a:pPr>
-              <a:spcAft>
                 <a:spcPts val="600"/>
               </a:spcAft>
-            </a:pPr>
-            <a:r>
-              <a:rPr b="1" sz="1050">
-                <a:solidFill>
-                  <a:srgbClr val="A51C30"/>
-                </a:solidFill>
+              <a:defRPr sz="1050" b="1">
+                <a:solidFill>
+                  <a:srgbClr val="38BDF8"/>
+                </a:solidFill>
+                <a:latin typeface="Consolas"/>
+              </a:defRPr>
+            </a:pPr>
+            <a:r>
+              <a:t>[LIVE TERMINAL] Alpaca Options Bot Status Console</a:t>
+            </a:r>
+          </a:p>
+          <a:p>
+            <a:pPr>
+              <a:spcAft>
+                <a:spcPts val="200"/>
+              </a:spcAft>
+            </a:pPr>
+            <a:r>
+              <a:rPr sz="850">
+                <a:solidFill>
+                  <a:srgbClr val="F3F4F6"/>
+                </a:solidFill>
+                <a:latin typeface="Consolas"/>
               </a:rPr>
-              <a:t>• ATM Option Contract Selection: </a:t>
-            </a:r>
-            <a:r>
-              <a:rPr sz="1000">
-                <a:solidFill>
-                  <a:srgbClr val="1E293B"/>
-                </a:solidFill>
+              <a:t>&gt; Initializing REST Session: Alpaca Paper Trading API</a:t>
+            </a:r>
+          </a:p>
+          <a:p>
+            <a:pPr>
+              <a:spcAft>
+                <a:spcPts val="200"/>
+              </a:spcAft>
+            </a:pPr>
+            <a:r>
+              <a:rPr sz="850">
+                <a:solidFill>
+                  <a:srgbClr val="4ADE80"/>
+                </a:solidFill>
+                <a:latin typeface="Consolas"/>
               </a:rPr>
-              <a:t> Screener identifies At-The-Money (ATM) Calls for Top Decile predictions and Puts for Bottom Decile.</a:t>
+              <a:t>[SUCCESS] Authenticated: Account #PA382901-USD</a:t>
             </a:r>
           </a:p>
           <a:p>
             <a:pPr>
               <a:spcAft>
-                <a:spcPts val="600"/>
+                <a:spcPts val="200"/>
               </a:spcAft>
             </a:pPr>
             <a:r>
-              <a:rPr b="1" sz="1050">
-                <a:solidFill>
-                  <a:srgbClr val="A51C30"/>
-                </a:solidFill>
+              <a:rPr sz="850">
+                <a:solidFill>
+                  <a:srgbClr val="FACC15"/>
+                </a:solidFill>
+                <a:latin typeface="Consolas"/>
               </a:rPr>
-              <a:t>• Position Sizing Controls: </a:t>
-            </a:r>
-            <a:r>
-              <a:rPr sz="1000">
-                <a:solidFill>
-                  <a:srgbClr val="1E293B"/>
-                </a:solidFill>
+              <a:t>Equity: $104,460.78 USD | Buying Power: $280,532.12 USD</a:t>
+            </a:r>
+          </a:p>
+          <a:p>
+            <a:pPr>
+              <a:spcAft>
+                <a:spcPts val="200"/>
+              </a:spcAft>
+            </a:pPr>
+            <a:r>
+              <a:rPr sz="850">
+                <a:solidFill>
+                  <a:srgbClr val="38BDF8"/>
+                </a:solidFill>
+                <a:latin typeface="Consolas"/>
               </a:rPr>
-              <a:t> Order sizes capped at 2% total equity per option contract leg to prevent capital concentration.</a:t>
+              <a:t>--------------------------------------------------</a:t>
             </a:r>
           </a:p>
           <a:p>
             <a:pPr>
               <a:spcAft>
-                <a:spcPts val="600"/>
+                <a:spcPts val="200"/>
               </a:spcAft>
             </a:pPr>
             <a:r>
-              <a:rPr b="1" sz="1050">
-                <a:solidFill>
-                  <a:srgbClr val="A51C30"/>
-                </a:solidFill>
+              <a:rPr sz="850">
+                <a:solidFill>
+                  <a:srgbClr val="F3F4F6"/>
+                </a:solidFill>
+                <a:latin typeface="Consolas"/>
               </a:rPr>
-              <a:t>• Automated Circuit Breaker: </a:t>
-            </a:r>
-            <a:r>
-              <a:rPr sz="1000">
-                <a:solidFill>
-                  <a:srgbClr val="1E293B"/>
-                </a:solidFill>
+              <a:t>&gt; Running TFDMGA Cross-Sectional Inference Engine...</a:t>
+            </a:r>
+          </a:p>
+          <a:p>
+            <a:pPr>
+              <a:spcAft>
+                <a:spcPts val="200"/>
+              </a:spcAft>
+            </a:pPr>
+            <a:r>
+              <a:rPr sz="850">
+                <a:solidFill>
+                  <a:srgbClr val="4ADE80"/>
+                </a:solidFill>
+                <a:latin typeface="Consolas"/>
               </a:rPr>
-              <a:t> Daily automated checking of stop-loss (-2%) and profit target (+4%) triggers across 11 active positions.</a:t>
+              <a:t>[SIGNAL] Top Decile (Long Calls): NVDA, AAPL, MSFT</a:t>
+            </a:r>
+          </a:p>
+          <a:p>
+            <a:pPr>
+              <a:spcAft>
+                <a:spcPts val="200"/>
+              </a:spcAft>
+            </a:pPr>
+            <a:r>
+              <a:rPr sz="850">
+                <a:solidFill>
+                  <a:srgbClr val="4ADE80"/>
+                </a:solidFill>
+                <a:latin typeface="Consolas"/>
+              </a:rPr>
+              <a:t>[SIGNAL] Bottom Decile (Long Puts): INTC, TSLA, BMY</a:t>
+            </a:r>
+          </a:p>
+          <a:p>
+            <a:pPr>
+              <a:spcAft>
+                <a:spcPts val="200"/>
+              </a:spcAft>
+            </a:pPr>
+            <a:r>
+              <a:rPr sz="850">
+                <a:solidFill>
+                  <a:srgbClr val="F3F4F6"/>
+                </a:solidFill>
+                <a:latin typeface="Consolas"/>
+              </a:rPr>
+              <a:t>&gt; Routing 11 ATM Option Orders to Market Open...</a:t>
+            </a:r>
+          </a:p>
+          <a:p>
+            <a:pPr>
+              <a:spcAft>
+                <a:spcPts val="200"/>
+              </a:spcAft>
+            </a:pPr>
+            <a:r>
+              <a:rPr sz="850">
+                <a:solidFill>
+                  <a:srgbClr val="4ADE80"/>
+                </a:solidFill>
+                <a:latin typeface="Consolas"/>
+              </a:rPr>
+              <a:t>[STATUS] 11/11 Orders Executed | 2:1 TPSL Active</a:t>
+            </a:r>
+          </a:p>
+          <a:p>
+            <a:pPr>
+              <a:spcAft>
+                <a:spcPts val="200"/>
+              </a:spcAft>
+            </a:pPr>
+            <a:r>
+              <a:rPr sz="850">
+                <a:solidFill>
+                  <a:srgbClr val="38BDF8"/>
+                </a:solidFill>
+                <a:latin typeface="Consolas"/>
+              </a:rPr>
+              <a:t>[SYSTEM] Cloud Cron Daemon: Sleeping until 09:30 EST</a:t>
             </a:r>
           </a:p>
         </p:txBody>
@@ -7382,7 +7552,7 @@
         </p:nvSpPr>
         <p:spPr>
           <a:xfrm>
-            <a:off x="731520" y="365760"/>
+            <a:off x="731520" y="320040"/>
             <a:ext cx="10728655" cy="822960"/>
           </a:xfrm>
           <a:prstGeom prst="rect">
@@ -7413,7 +7583,7 @@
           </a:p>
           <a:p>
             <a:pPr>
-              <a:defRPr sz="2200" b="1">
+              <a:defRPr sz="2100" b="1">
                 <a:solidFill>
                   <a:srgbClr val="0F2043"/>
                 </a:solidFill>
@@ -7434,7 +7604,7 @@
         </p:nvSpPr>
         <p:spPr>
           <a:xfrm>
-            <a:off x="731520" y="1234440"/>
+            <a:off x="731520" y="1188720"/>
             <a:ext cx="10728655" cy="36576"/>
           </a:xfrm>
           <a:prstGeom prst="rect">
@@ -7478,7 +7648,7 @@
         <p:spPr>
           <a:xfrm>
             <a:off x="731520" y="6446520"/>
-            <a:ext cx="10728655" cy="320040"/>
+            <a:ext cx="8686800" cy="320040"/>
           </a:xfrm>
           <a:prstGeom prst="rect">
             <a:avLst/>
@@ -7503,19 +7673,6 @@
               <a:t>University of Verona | Department of Economics  •  Murtuza Yusuf Rangwala  •  Supervisor: Prof. Giuseppina Chesini</a:t>
             </a:r>
           </a:p>
-          <a:p>
-            <a:pPr algn="r">
-              <a:defRPr sz="900" b="1">
-                <a:solidFill>
-                  <a:srgbClr val="0F2043"/>
-                </a:solidFill>
-                <a:latin typeface="Calibri"/>
-              </a:defRPr>
-            </a:pPr>
-            <a:r>
-              <a:t>Slide 14 of 14</a:t>
-            </a:r>
-          </a:p>
         </p:txBody>
       </p:sp>
       <p:sp>
@@ -7562,8 +7719,8 @@
         </p:nvSpPr>
         <p:spPr>
           <a:xfrm>
-            <a:off x="731520" y="1463040"/>
-            <a:ext cx="3383280" cy="4663440"/>
+            <a:off x="731520" y="1371600"/>
+            <a:ext cx="3383280" cy="4846320"/>
           </a:xfrm>
           <a:prstGeom prst="roundRect">
             <a:avLst/>
@@ -7607,8 +7764,8 @@
         </p:nvSpPr>
         <p:spPr>
           <a:xfrm>
-            <a:off x="914400" y="1645920"/>
-            <a:ext cx="3017520" cy="4297680"/>
+            <a:off x="914400" y="1554480"/>
+            <a:ext cx="3017520" cy="4480560"/>
           </a:xfrm>
           <a:prstGeom prst="rect">
             <a:avLst/>
@@ -7625,7 +7782,7 @@
               <a:spcAft>
                 <a:spcPts val="800"/>
               </a:spcAft>
-              <a:defRPr sz="1400" b="1">
+              <a:defRPr sz="1300" b="1">
                 <a:solidFill>
                   <a:srgbClr val="0F2043"/>
                 </a:solidFill>
@@ -7738,8 +7895,8 @@
         </p:nvSpPr>
         <p:spPr>
           <a:xfrm>
-            <a:off x="4389120" y="1463040"/>
-            <a:ext cx="3383280" cy="4663440"/>
+            <a:off x="4389120" y="1371600"/>
+            <a:ext cx="3383280" cy="4846320"/>
           </a:xfrm>
           <a:prstGeom prst="roundRect">
             <a:avLst/>
@@ -7783,8 +7940,8 @@
         </p:nvSpPr>
         <p:spPr>
           <a:xfrm>
-            <a:off x="4572000" y="1645920"/>
-            <a:ext cx="3017520" cy="4297680"/>
+            <a:off x="4572000" y="1554480"/>
+            <a:ext cx="3017520" cy="4480560"/>
           </a:xfrm>
           <a:prstGeom prst="rect">
             <a:avLst/>
@@ -7801,7 +7958,7 @@
               <a:spcAft>
                 <a:spcPts val="800"/>
               </a:spcAft>
-              <a:defRPr sz="1400" b="1">
+              <a:defRPr sz="1300" b="1">
                 <a:solidFill>
                   <a:srgbClr val="A51C30"/>
                 </a:solidFill>
@@ -7891,8 +8048,8 @@
         </p:nvSpPr>
         <p:spPr>
           <a:xfrm>
-            <a:off x="8046720" y="1463040"/>
-            <a:ext cx="3383280" cy="4663440"/>
+            <a:off x="8046720" y="1371600"/>
+            <a:ext cx="3383280" cy="4846320"/>
           </a:xfrm>
           <a:prstGeom prst="roundRect">
             <a:avLst/>
@@ -7936,8 +8093,8 @@
         </p:nvSpPr>
         <p:spPr>
           <a:xfrm>
-            <a:off x="8229600" y="1645920"/>
-            <a:ext cx="3017520" cy="4297680"/>
+            <a:off x="8229600" y="1554480"/>
+            <a:ext cx="3017520" cy="4480560"/>
           </a:xfrm>
           <a:prstGeom prst="rect">
             <a:avLst/>
@@ -7954,7 +8111,7 @@
               <a:spcAft>
                 <a:spcPts val="1000"/>
               </a:spcAft>
-              <a:defRPr sz="1400" b="1">
+              <a:defRPr sz="1300" b="1">
                 <a:solidFill>
                   <a:srgbClr val="D4AF37"/>
                 </a:solidFill>
@@ -7986,7 +8143,7 @@
               <a:spcAft>
                 <a:spcPts val="1400"/>
               </a:spcAft>
-              <a:defRPr sz="1050">
+              <a:defRPr sz="1000">
                 <a:solidFill>
                   <a:srgbClr val="E2E8F0"/>
                 </a:solidFill>
@@ -7999,7 +8156,7 @@
           </a:p>
           <a:p>
             <a:pPr algn="ctr">
-              <a:defRPr sz="1200" b="1">
+              <a:defRPr sz="1150" b="1">
                 <a:solidFill>
                   <a:srgbClr val="D4AF37"/>
                 </a:solidFill>
@@ -8046,7 +8203,7 @@
         </p:nvSpPr>
         <p:spPr>
           <a:xfrm>
-            <a:off x="731520" y="365760"/>
+            <a:off x="731520" y="320040"/>
             <a:ext cx="10728655" cy="822960"/>
           </a:xfrm>
           <a:prstGeom prst="rect">
@@ -8077,7 +8234,7 @@
           </a:p>
           <a:p>
             <a:pPr>
-              <a:defRPr sz="2200" b="1">
+              <a:defRPr sz="2100" b="1">
                 <a:solidFill>
                   <a:srgbClr val="0F2043"/>
                 </a:solidFill>
@@ -8098,7 +8255,7 @@
         </p:nvSpPr>
         <p:spPr>
           <a:xfrm>
-            <a:off x="731520" y="1234440"/>
+            <a:off x="731520" y="1188720"/>
             <a:ext cx="10728655" cy="36576"/>
           </a:xfrm>
           <a:prstGeom prst="rect">
@@ -8142,7 +8299,7 @@
         <p:spPr>
           <a:xfrm>
             <a:off x="731520" y="6446520"/>
-            <a:ext cx="10728655" cy="320040"/>
+            <a:ext cx="8686800" cy="320040"/>
           </a:xfrm>
           <a:prstGeom prst="rect">
             <a:avLst/>
@@ -8167,19 +8324,6 @@
               <a:t>University of Verona | Department of Economics  •  Murtuza Yusuf Rangwala  •  Supervisor: Prof. Giuseppina Chesini</a:t>
             </a:r>
           </a:p>
-          <a:p>
-            <a:pPr algn="r">
-              <a:defRPr sz="900" b="1">
-                <a:solidFill>
-                  <a:srgbClr val="0F2043"/>
-                </a:solidFill>
-                <a:latin typeface="Calibri"/>
-              </a:defRPr>
-            </a:pPr>
-            <a:r>
-              <a:t>Slide 2 of 14</a:t>
-            </a:r>
-          </a:p>
         </p:txBody>
       </p:sp>
       <p:sp>
@@ -8226,8 +8370,8 @@
         </p:nvSpPr>
         <p:spPr>
           <a:xfrm>
-            <a:off x="731520" y="1463040"/>
-            <a:ext cx="2468880" cy="1463040"/>
+            <a:off x="731520" y="1371600"/>
+            <a:ext cx="2468880" cy="1371600"/>
           </a:xfrm>
           <a:prstGeom prst="roundRect">
             <a:avLst/>
@@ -8271,8 +8415,8 @@
         </p:nvSpPr>
         <p:spPr>
           <a:xfrm>
-            <a:off x="868680" y="1600200"/>
-            <a:ext cx="2194560" cy="1188720"/>
+            <a:off x="868680" y="1508760"/>
+            <a:ext cx="2194560" cy="1097280"/>
           </a:xfrm>
           <a:prstGeom prst="rect">
             <a:avLst/>
@@ -8286,7 +8430,7 @@
           <a:lstStyle/>
           <a:p>
             <a:pPr algn="ctr">
-              <a:defRPr sz="2800" b="1">
+              <a:defRPr sz="2600" b="1">
                 <a:solidFill>
                   <a:srgbClr val="A51C30"/>
                 </a:solidFill>
@@ -8300,9 +8444,9 @@
           <a:p>
             <a:pPr algn="ctr">
               <a:spcBef>
-                <a:spcPts val="400"/>
+                <a:spcPts val="300"/>
               </a:spcBef>
-              <a:defRPr sz="1100" b="1">
+              <a:defRPr sz="1050" b="1">
                 <a:solidFill>
                   <a:srgbClr val="1E293B"/>
                 </a:solidFill>
@@ -8318,7 +8462,7 @@
               <a:spcBef>
                 <a:spcPts val="200"/>
               </a:spcBef>
-              <a:defRPr sz="950">
+              <a:defRPr sz="900">
                 <a:solidFill>
                   <a:srgbClr val="64748B"/>
                 </a:solidFill>
@@ -8339,8 +8483,8 @@
         </p:nvSpPr>
         <p:spPr>
           <a:xfrm>
-            <a:off x="3483864" y="1463040"/>
-            <a:ext cx="2468880" cy="1463040"/>
+            <a:off x="3483864" y="1371600"/>
+            <a:ext cx="2468880" cy="1371600"/>
           </a:xfrm>
           <a:prstGeom prst="roundRect">
             <a:avLst/>
@@ -8384,8 +8528,8 @@
         </p:nvSpPr>
         <p:spPr>
           <a:xfrm>
-            <a:off x="3621024" y="1600200"/>
-            <a:ext cx="2194560" cy="1188720"/>
+            <a:off x="3621024" y="1508760"/>
+            <a:ext cx="2194560" cy="1097280"/>
           </a:xfrm>
           <a:prstGeom prst="rect">
             <a:avLst/>
@@ -8399,7 +8543,7 @@
           <a:lstStyle/>
           <a:p>
             <a:pPr algn="ctr">
-              <a:defRPr sz="2800" b="1">
+              <a:defRPr sz="2600" b="1">
                 <a:solidFill>
                   <a:srgbClr val="0F2043"/>
                 </a:solidFill>
@@ -8413,9 +8557,9 @@
           <a:p>
             <a:pPr algn="ctr">
               <a:spcBef>
-                <a:spcPts val="400"/>
+                <a:spcPts val="300"/>
               </a:spcBef>
-              <a:defRPr sz="1100" b="1">
+              <a:defRPr sz="1050" b="1">
                 <a:solidFill>
                   <a:srgbClr val="1E293B"/>
                 </a:solidFill>
@@ -8431,7 +8575,7 @@
               <a:spcBef>
                 <a:spcPts val="200"/>
               </a:spcBef>
-              <a:defRPr sz="950">
+              <a:defRPr sz="900">
                 <a:solidFill>
                   <a:srgbClr val="64748B"/>
                 </a:solidFill>
@@ -8452,8 +8596,8 @@
         </p:nvSpPr>
         <p:spPr>
           <a:xfrm>
-            <a:off x="6236208" y="1463040"/>
-            <a:ext cx="2468880" cy="1463040"/>
+            <a:off x="6236208" y="1371600"/>
+            <a:ext cx="2468880" cy="1371600"/>
           </a:xfrm>
           <a:prstGeom prst="roundRect">
             <a:avLst/>
@@ -8497,8 +8641,8 @@
         </p:nvSpPr>
         <p:spPr>
           <a:xfrm>
-            <a:off x="6373368" y="1600200"/>
-            <a:ext cx="2194560" cy="1188720"/>
+            <a:off x="6373368" y="1508760"/>
+            <a:ext cx="2194560" cy="1097280"/>
           </a:xfrm>
           <a:prstGeom prst="rect">
             <a:avLst/>
@@ -8512,7 +8656,7 @@
           <a:lstStyle/>
           <a:p>
             <a:pPr algn="ctr">
-              <a:defRPr sz="2800" b="1">
+              <a:defRPr sz="2600" b="1">
                 <a:solidFill>
                   <a:srgbClr val="166534"/>
                 </a:solidFill>
@@ -8526,9 +8670,9 @@
           <a:p>
             <a:pPr algn="ctr">
               <a:spcBef>
-                <a:spcPts val="400"/>
+                <a:spcPts val="300"/>
               </a:spcBef>
-              <a:defRPr sz="1100" b="1">
+              <a:defRPr sz="1050" b="1">
                 <a:solidFill>
                   <a:srgbClr val="1E293B"/>
                 </a:solidFill>
@@ -8544,7 +8688,7 @@
               <a:spcBef>
                 <a:spcPts val="200"/>
               </a:spcBef>
-              <a:defRPr sz="950">
+              <a:defRPr sz="900">
                 <a:solidFill>
                   <a:srgbClr val="64748B"/>
                 </a:solidFill>
@@ -8565,8 +8709,8 @@
         </p:nvSpPr>
         <p:spPr>
           <a:xfrm>
-            <a:off x="8988552" y="1463040"/>
-            <a:ext cx="2468880" cy="1463040"/>
+            <a:off x="8988552" y="1371600"/>
+            <a:ext cx="2468880" cy="1371600"/>
           </a:xfrm>
           <a:prstGeom prst="roundRect">
             <a:avLst/>
@@ -8610,8 +8754,8 @@
         </p:nvSpPr>
         <p:spPr>
           <a:xfrm>
-            <a:off x="9125712" y="1600200"/>
-            <a:ext cx="2194560" cy="1188720"/>
+            <a:off x="9125712" y="1508760"/>
+            <a:ext cx="2194560" cy="1097280"/>
           </a:xfrm>
           <a:prstGeom prst="rect">
             <a:avLst/>
@@ -8625,7 +8769,7 @@
           <a:lstStyle/>
           <a:p>
             <a:pPr algn="ctr">
-              <a:defRPr sz="2800" b="1">
+              <a:defRPr sz="2600" b="1">
                 <a:solidFill>
                   <a:srgbClr val="0F2043"/>
                 </a:solidFill>
@@ -8639,9 +8783,9 @@
           <a:p>
             <a:pPr algn="ctr">
               <a:spcBef>
-                <a:spcPts val="400"/>
+                <a:spcPts val="300"/>
               </a:spcBef>
-              <a:defRPr sz="1100" b="1">
+              <a:defRPr sz="1050" b="1">
                 <a:solidFill>
                   <a:srgbClr val="1E293B"/>
                 </a:solidFill>
@@ -8657,7 +8801,7 @@
               <a:spcBef>
                 <a:spcPts val="200"/>
               </a:spcBef>
-              <a:defRPr sz="950">
+              <a:defRPr sz="900">
                 <a:solidFill>
                   <a:srgbClr val="64748B"/>
                 </a:solidFill>
@@ -8678,8 +8822,8 @@
         </p:nvSpPr>
         <p:spPr>
           <a:xfrm>
-            <a:off x="731520" y="3154680"/>
-            <a:ext cx="5212080" cy="3108960"/>
+            <a:off x="731520" y="2971800"/>
+            <a:ext cx="5212080" cy="3291840"/>
           </a:xfrm>
           <a:prstGeom prst="roundRect">
             <a:avLst/>
@@ -8723,8 +8867,8 @@
         </p:nvSpPr>
         <p:spPr>
           <a:xfrm>
-            <a:off x="914400" y="3337560"/>
-            <a:ext cx="4846320" cy="2743200"/>
+            <a:off x="914400" y="3108960"/>
+            <a:ext cx="4846320" cy="3017520"/>
           </a:xfrm>
           <a:prstGeom prst="rect">
             <a:avLst/>
@@ -8739,27 +8883,27 @@
           <a:p>
             <a:pPr>
               <a:spcAft>
-                <a:spcPts val="800"/>
-              </a:spcAft>
-              <a:defRPr sz="1400" b="1">
-                <a:solidFill>
-                  <a:srgbClr val="0F2043"/>
-                </a:solidFill>
-                <a:latin typeface="Arial"/>
-              </a:defRPr>
-            </a:pPr>
-            <a:r>
-              <a:t>Core Methodological Contributions</a:t>
-            </a:r>
-          </a:p>
-          <a:p>
-            <a:pPr>
-              <a:spcAft>
                 <a:spcPts val="600"/>
               </a:spcAft>
-            </a:pPr>
-            <a:r>
-              <a:rPr b="1" sz="1100">
+              <a:defRPr sz="1350" b="1">
+                <a:solidFill>
+                  <a:srgbClr val="0F2043"/>
+                </a:solidFill>
+                <a:latin typeface="Arial"/>
+              </a:defRPr>
+            </a:pPr>
+            <a:r>
+              <a:t>Core Methodological Contributions</a:t>
+            </a:r>
+          </a:p>
+          <a:p>
+            <a:pPr>
+              <a:spcAft>
+                <a:spcPts val="500"/>
+              </a:spcAft>
+            </a:pPr>
+            <a:r>
+              <a:rPr b="1" sz="1050">
                 <a:solidFill>
                   <a:srgbClr val="0F2043"/>
                 </a:solidFill>
@@ -8767,7 +8911,7 @@
               <a:t>• Causal Temporal Convolutions (TCN):</a:t>
             </a:r>
             <a:r>
-              <a:rPr sz="1050">
+              <a:rPr sz="1000">
                 <a:solidFill>
                   <a:srgbClr val="1E293B"/>
                 </a:solidFill>
@@ -8778,11 +8922,11 @@
           <a:p>
             <a:pPr>
               <a:spcAft>
-                <a:spcPts val="600"/>
+                <a:spcPts val="500"/>
               </a:spcAft>
             </a:pPr>
             <a:r>
-              <a:rPr b="1" sz="1100">
+              <a:rPr b="1" sz="1050">
                 <a:solidFill>
                   <a:srgbClr val="0F2043"/>
                 </a:solidFill>
@@ -8790,7 +8934,7 @@
               <a:t>• Ring Attention Mechanism:</a:t>
             </a:r>
             <a:r>
-              <a:rPr sz="1050">
+              <a:rPr sz="1000">
                 <a:solidFill>
                   <a:srgbClr val="1E293B"/>
                 </a:solidFill>
@@ -8801,11 +8945,11 @@
           <a:p>
             <a:pPr>
               <a:spcAft>
-                <a:spcPts val="600"/>
+                <a:spcPts val="500"/>
               </a:spcAft>
             </a:pPr>
             <a:r>
-              <a:rPr b="1" sz="1100">
+              <a:rPr b="1" sz="1050">
                 <a:solidFill>
                   <a:srgbClr val="0F2043"/>
                 </a:solidFill>
@@ -8813,7 +8957,7 @@
               <a:t>• 3-Way Macro Gating Engine:</a:t>
             </a:r>
             <a:r>
-              <a:rPr sz="1050">
+              <a:rPr sz="1000">
                 <a:solidFill>
                   <a:srgbClr val="1E293B"/>
                 </a:solidFill>
@@ -8824,11 +8968,11 @@
           <a:p>
             <a:pPr>
               <a:spcAft>
-                <a:spcPts val="600"/>
+                <a:spcPts val="500"/>
               </a:spcAft>
             </a:pPr>
             <a:r>
-              <a:rPr b="1" sz="1100">
+              <a:rPr b="1" sz="1050">
                 <a:solidFill>
                   <a:srgbClr val="0F2043"/>
                 </a:solidFill>
@@ -8836,7 +8980,7 @@
               <a:t>• 5-Fold Walk-Forward Protocol:</a:t>
             </a:r>
             <a:r>
-              <a:rPr sz="1050">
+              <a:rPr sz="1000">
                 <a:solidFill>
                   <a:srgbClr val="1E293B"/>
                 </a:solidFill>
@@ -8854,8 +8998,8 @@
         </p:nvSpPr>
         <p:spPr>
           <a:xfrm>
-            <a:off x="6245352" y="3154680"/>
-            <a:ext cx="5212080" cy="3108960"/>
+            <a:off x="6245352" y="2971800"/>
+            <a:ext cx="5212080" cy="3291840"/>
           </a:xfrm>
           <a:prstGeom prst="roundRect">
             <a:avLst/>
@@ -8899,8 +9043,8 @@
         </p:nvSpPr>
         <p:spPr>
           <a:xfrm>
-            <a:off x="6428232" y="3337560"/>
-            <a:ext cx="4846320" cy="2743200"/>
+            <a:off x="6428232" y="3108960"/>
+            <a:ext cx="4846320" cy="3017520"/>
           </a:xfrm>
           <a:prstGeom prst="rect">
             <a:avLst/>
@@ -8915,27 +9059,27 @@
           <a:p>
             <a:pPr>
               <a:spcAft>
-                <a:spcPts val="800"/>
-              </a:spcAft>
-              <a:defRPr sz="1400" b="1">
-                <a:solidFill>
-                  <a:srgbClr val="A51C30"/>
-                </a:solidFill>
-                <a:latin typeface="Arial"/>
-              </a:defRPr>
-            </a:pPr>
-            <a:r>
-              <a:t>Empirical Validation &amp; Live Deployment</a:t>
-            </a:r>
-          </a:p>
-          <a:p>
-            <a:pPr>
-              <a:spcAft>
                 <a:spcPts val="600"/>
               </a:spcAft>
-            </a:pPr>
-            <a:r>
-              <a:rPr b="1" sz="1100">
+              <a:defRPr sz="1350" b="1">
+                <a:solidFill>
+                  <a:srgbClr val="A51C30"/>
+                </a:solidFill>
+                <a:latin typeface="Arial"/>
+              </a:defRPr>
+            </a:pPr>
+            <a:r>
+              <a:t>Empirical Validation &amp; Live Deployment</a:t>
+            </a:r>
+          </a:p>
+          <a:p>
+            <a:pPr>
+              <a:spcAft>
+                <a:spcPts val="500"/>
+              </a:spcAft>
+            </a:pPr>
+            <a:r>
+              <a:rPr b="1" sz="1050">
                 <a:solidFill>
                   <a:srgbClr val="A51C30"/>
                 </a:solidFill>
@@ -8943,7 +9087,7 @@
               <a:t>• Statistical Dominance:</a:t>
             </a:r>
             <a:r>
-              <a:rPr sz="1050">
+              <a:rPr sz="1000">
                 <a:solidFill>
                   <a:srgbClr val="1E293B"/>
                 </a:solidFill>
@@ -8954,11 +9098,11 @@
           <a:p>
             <a:pPr>
               <a:spcAft>
-                <a:spcPts val="600"/>
+                <a:spcPts val="500"/>
               </a:spcAft>
             </a:pPr>
             <a:r>
-              <a:rPr b="1" sz="1100">
+              <a:rPr b="1" sz="1050">
                 <a:solidFill>
                   <a:srgbClr val="A51C30"/>
                 </a:solidFill>
@@ -8966,7 +9110,7 @@
               <a:t>• Transaction Cost Resilience:</a:t>
             </a:r>
             <a:r>
-              <a:rPr sz="1050">
+              <a:rPr sz="1000">
                 <a:solidFill>
                   <a:srgbClr val="1E293B"/>
                 </a:solidFill>
@@ -8977,11 +9121,11 @@
           <a:p>
             <a:pPr>
               <a:spcAft>
-                <a:spcPts val="600"/>
+                <a:spcPts val="500"/>
               </a:spcAft>
             </a:pPr>
             <a:r>
-              <a:rPr b="1" sz="1100">
+              <a:rPr b="1" sz="1050">
                 <a:solidFill>
                   <a:srgbClr val="A51C30"/>
                 </a:solidFill>
@@ -8989,7 +9133,7 @@
               <a:t>• Fama-French Spanning Proof:</a:t>
             </a:r>
             <a:r>
-              <a:rPr sz="1050">
+              <a:rPr sz="1000">
                 <a:solidFill>
                   <a:srgbClr val="1E293B"/>
                 </a:solidFill>
@@ -9000,11 +9144,11 @@
           <a:p>
             <a:pPr>
               <a:spcAft>
-                <a:spcPts val="600"/>
+                <a:spcPts val="500"/>
               </a:spcAft>
             </a:pPr>
             <a:r>
-              <a:rPr b="1" sz="1100">
+              <a:rPr b="1" sz="1050">
                 <a:solidFill>
                   <a:srgbClr val="A51C30"/>
                 </a:solidFill>
@@ -9012,7 +9156,7 @@
               <a:t>• Live Alpaca Options Execution:</a:t>
             </a:r>
             <a:r>
-              <a:rPr sz="1050">
+              <a:rPr sz="1000">
                 <a:solidFill>
                   <a:srgbClr val="1E293B"/>
                 </a:solidFill>
@@ -9056,7 +9200,7 @@
         </p:nvSpPr>
         <p:spPr>
           <a:xfrm>
-            <a:off x="731520" y="365760"/>
+            <a:off x="731520" y="320040"/>
             <a:ext cx="10728655" cy="822960"/>
           </a:xfrm>
           <a:prstGeom prst="rect">
@@ -9087,7 +9231,7 @@
           </a:p>
           <a:p>
             <a:pPr>
-              <a:defRPr sz="2200" b="1">
+              <a:defRPr sz="2100" b="1">
                 <a:solidFill>
                   <a:srgbClr val="0F2043"/>
                 </a:solidFill>
@@ -9108,7 +9252,7 @@
         </p:nvSpPr>
         <p:spPr>
           <a:xfrm>
-            <a:off x="731520" y="1234440"/>
+            <a:off x="731520" y="1188720"/>
             <a:ext cx="10728655" cy="36576"/>
           </a:xfrm>
           <a:prstGeom prst="rect">
@@ -9152,7 +9296,7 @@
         <p:spPr>
           <a:xfrm>
             <a:off x="731520" y="6446520"/>
-            <a:ext cx="10728655" cy="320040"/>
+            <a:ext cx="8686800" cy="320040"/>
           </a:xfrm>
           <a:prstGeom prst="rect">
             <a:avLst/>
@@ -9177,19 +9321,6 @@
               <a:t>University of Verona | Department of Economics  •  Murtuza Yusuf Rangwala  •  Supervisor: Prof. Giuseppina Chesini</a:t>
             </a:r>
           </a:p>
-          <a:p>
-            <a:pPr algn="r">
-              <a:defRPr sz="900" b="1">
-                <a:solidFill>
-                  <a:srgbClr val="0F2043"/>
-                </a:solidFill>
-                <a:latin typeface="Calibri"/>
-              </a:defRPr>
-            </a:pPr>
-            <a:r>
-              <a:t>Slide 3 of 14</a:t>
-            </a:r>
-          </a:p>
         </p:txBody>
       </p:sp>
       <p:sp>
@@ -9236,8 +9367,8 @@
         </p:nvSpPr>
         <p:spPr>
           <a:xfrm>
-            <a:off x="731520" y="1463040"/>
-            <a:ext cx="3840480" cy="4754880"/>
+            <a:off x="731520" y="1371600"/>
+            <a:ext cx="3840480" cy="4846320"/>
           </a:xfrm>
           <a:prstGeom prst="roundRect">
             <a:avLst/>
@@ -9281,8 +9412,8 @@
         </p:nvSpPr>
         <p:spPr>
           <a:xfrm>
-            <a:off x="914400" y="1645920"/>
-            <a:ext cx="3474720" cy="4389120"/>
+            <a:off x="914400" y="1554480"/>
+            <a:ext cx="3474720" cy="4480560"/>
           </a:xfrm>
           <a:prstGeom prst="rect">
             <a:avLst/>
@@ -9297,27 +9428,27 @@
           <a:p>
             <a:pPr>
               <a:spcAft>
-                <a:spcPts val="1000"/>
-              </a:spcAft>
-              <a:defRPr sz="1500" b="1">
-                <a:solidFill>
-                  <a:srgbClr val="0F2043"/>
-                </a:solidFill>
-                <a:latin typeface="Arial"/>
-              </a:defRPr>
-            </a:pPr>
-            <a:r>
-              <a:t>The Empirical Crisis in Asset Pricing</a:t>
-            </a:r>
-          </a:p>
-          <a:p>
-            <a:pPr>
-              <a:spcAft>
                 <a:spcPts val="800"/>
               </a:spcAft>
-            </a:pPr>
-            <a:r>
-              <a:rPr b="1" sz="1100">
+              <a:defRPr sz="1450" b="1">
+                <a:solidFill>
+                  <a:srgbClr val="0F2043"/>
+                </a:solidFill>
+                <a:latin typeface="Arial"/>
+              </a:defRPr>
+            </a:pPr>
+            <a:r>
+              <a:t>The Empirical Crisis in Asset Pricing</a:t>
+            </a:r>
+          </a:p>
+          <a:p>
+            <a:pPr>
+              <a:spcAft>
+                <a:spcPts val="600"/>
+              </a:spcAft>
+            </a:pPr>
+            <a:r>
+              <a:rPr b="1" sz="1050">
                 <a:solidFill>
                   <a:srgbClr val="0F2043"/>
                 </a:solidFill>
@@ -9325,7 +9456,7 @@
               <a:t>Cochrane (2011) 'Factor Zoo': </a:t>
             </a:r>
             <a:r>
-              <a:rPr sz="1000">
+              <a:rPr sz="950">
                 <a:solidFill>
                   <a:srgbClr val="1E293B"/>
                 </a:solidFill>
@@ -9336,11 +9467,11 @@
           <a:p>
             <a:pPr>
               <a:spcAft>
-                <a:spcPts val="800"/>
+                <a:spcPts val="600"/>
               </a:spcAft>
             </a:pPr>
             <a:r>
-              <a:rPr b="1" sz="1100">
+              <a:rPr b="1" sz="1050">
                 <a:solidFill>
                   <a:srgbClr val="0F2043"/>
                 </a:solidFill>
@@ -9348,7 +9479,7 @@
               <a:t>Harvey, Liu, &amp; Zhu (2016): </a:t>
             </a:r>
             <a:r>
-              <a:rPr sz="1000">
+              <a:rPr sz="950">
                 <a:solidFill>
                   <a:srgbClr val="1E293B"/>
                 </a:solidFill>
@@ -9359,11 +9490,11 @@
           <a:p>
             <a:pPr>
               <a:spcAft>
-                <a:spcPts val="800"/>
+                <a:spcPts val="600"/>
               </a:spcAft>
             </a:pPr>
             <a:r>
-              <a:rPr b="1" sz="1100">
+              <a:rPr b="1" sz="1050">
                 <a:solidFill>
                   <a:srgbClr val="0F2043"/>
                 </a:solidFill>
@@ -9371,7 +9502,7 @@
               <a:t>McLean &amp; Pontiff (2016): </a:t>
             </a:r>
             <a:r>
-              <a:rPr sz="1000">
+              <a:rPr sz="950">
                 <a:solidFill>
                   <a:srgbClr val="1E293B"/>
                 </a:solidFill>
@@ -9382,11 +9513,11 @@
           <a:p>
             <a:pPr>
               <a:spcAft>
-                <a:spcPts val="800"/>
+                <a:spcPts val="600"/>
               </a:spcAft>
             </a:pPr>
             <a:r>
-              <a:rPr b="1" sz="1100">
+              <a:rPr b="1" sz="1050">
                 <a:solidFill>
                   <a:srgbClr val="0F2043"/>
                 </a:solidFill>
@@ -9394,7 +9525,7 @@
               <a:t>Thesis Objective: </a:t>
             </a:r>
             <a:r>
-              <a:rPr sz="1000">
+              <a:rPr sz="950">
                 <a:solidFill>
                   <a:srgbClr val="1E293B"/>
                 </a:solidFill>
@@ -9412,8 +9543,8 @@
         </p:nvSpPr>
         <p:spPr>
           <a:xfrm>
-            <a:off x="4846320" y="1463040"/>
-            <a:ext cx="6583680" cy="1417320"/>
+            <a:off x="4846320" y="1371600"/>
+            <a:ext cx="6583680" cy="1463040"/>
           </a:xfrm>
           <a:prstGeom prst="roundRect">
             <a:avLst/>
@@ -9457,8 +9588,8 @@
         </p:nvSpPr>
         <p:spPr>
           <a:xfrm>
-            <a:off x="5029200" y="1600200"/>
-            <a:ext cx="6217920" cy="1143000"/>
+            <a:off x="5029200" y="1508760"/>
+            <a:ext cx="6217920" cy="1188720"/>
           </a:xfrm>
           <a:prstGeom prst="rect">
             <a:avLst/>
@@ -9475,7 +9606,7 @@
               <a:spcAft>
                 <a:spcPts val="400"/>
               </a:spcAft>
-              <a:defRPr sz="1300" b="1">
+              <a:defRPr sz="1250" b="1">
                 <a:solidFill>
                   <a:srgbClr val="0F2043"/>
                 </a:solidFill>
@@ -9488,7 +9619,7 @@
           </a:p>
           <a:p>
             <a:pPr>
-              <a:defRPr sz="1050">
+              <a:defRPr sz="1000">
                 <a:solidFill>
                   <a:srgbClr val="1E293B"/>
                 </a:solidFill>
@@ -9509,8 +9640,8 @@
         </p:nvSpPr>
         <p:spPr>
           <a:xfrm>
-            <a:off x="4846320" y="3108960"/>
-            <a:ext cx="6583680" cy="1417320"/>
+            <a:off x="4846320" y="3063240"/>
+            <a:ext cx="6583680" cy="1463040"/>
           </a:xfrm>
           <a:prstGeom prst="roundRect">
             <a:avLst/>
@@ -9554,8 +9685,8 @@
         </p:nvSpPr>
         <p:spPr>
           <a:xfrm>
-            <a:off x="5029200" y="3246120"/>
-            <a:ext cx="6217920" cy="1143000"/>
+            <a:off x="5029200" y="3200400"/>
+            <a:ext cx="6217920" cy="1188720"/>
           </a:xfrm>
           <a:prstGeom prst="rect">
             <a:avLst/>
@@ -9572,7 +9703,7 @@
               <a:spcAft>
                 <a:spcPts val="400"/>
               </a:spcAft>
-              <a:defRPr sz="1300" b="1">
+              <a:defRPr sz="1250" b="1">
                 <a:solidFill>
                   <a:srgbClr val="A51C30"/>
                 </a:solidFill>
@@ -9585,7 +9716,7 @@
           </a:p>
           <a:p>
             <a:pPr>
-              <a:defRPr sz="1050">
+              <a:defRPr sz="1000">
                 <a:solidFill>
                   <a:srgbClr val="1E293B"/>
                 </a:solidFill>
@@ -9607,7 +9738,7 @@
         <p:spPr>
           <a:xfrm>
             <a:off x="4846320" y="4754880"/>
-            <a:ext cx="6583680" cy="1417320"/>
+            <a:ext cx="6583680" cy="1463040"/>
           </a:xfrm>
           <a:prstGeom prst="roundRect">
             <a:avLst/>
@@ -9652,7 +9783,7 @@
         <p:spPr>
           <a:xfrm>
             <a:off x="5029200" y="4892040"/>
-            <a:ext cx="6217920" cy="1143000"/>
+            <a:ext cx="6217920" cy="1188720"/>
           </a:xfrm>
           <a:prstGeom prst="rect">
             <a:avLst/>
@@ -9669,7 +9800,7 @@
               <a:spcAft>
                 <a:spcPts val="400"/>
               </a:spcAft>
-              <a:defRPr sz="1300" b="1">
+              <a:defRPr sz="1250" b="1">
                 <a:solidFill>
                   <a:srgbClr val="D4AF37"/>
                 </a:solidFill>
@@ -9682,7 +9813,7 @@
           </a:p>
           <a:p>
             <a:pPr>
-              <a:defRPr sz="1050">
+              <a:defRPr sz="1000">
                 <a:solidFill>
                   <a:srgbClr val="1E293B"/>
                 </a:solidFill>
@@ -9729,7 +9860,7 @@
         </p:nvSpPr>
         <p:spPr>
           <a:xfrm>
-            <a:off x="731520" y="365760"/>
+            <a:off x="731520" y="320040"/>
             <a:ext cx="10728655" cy="822960"/>
           </a:xfrm>
           <a:prstGeom prst="rect">
@@ -9760,7 +9891,7 @@
           </a:p>
           <a:p>
             <a:pPr>
-              <a:defRPr sz="2200" b="1">
+              <a:defRPr sz="2100" b="1">
                 <a:solidFill>
                   <a:srgbClr val="0F2043"/>
                 </a:solidFill>
@@ -9781,7 +9912,7 @@
         </p:nvSpPr>
         <p:spPr>
           <a:xfrm>
-            <a:off x="731520" y="1234440"/>
+            <a:off x="731520" y="1188720"/>
             <a:ext cx="10728655" cy="36576"/>
           </a:xfrm>
           <a:prstGeom prst="rect">
@@ -9825,7 +9956,7 @@
         <p:spPr>
           <a:xfrm>
             <a:off x="731520" y="6446520"/>
-            <a:ext cx="10728655" cy="320040"/>
+            <a:ext cx="8686800" cy="320040"/>
           </a:xfrm>
           <a:prstGeom prst="rect">
             <a:avLst/>
@@ -9850,19 +9981,6 @@
               <a:t>University of Verona | Department of Economics  •  Murtuza Yusuf Rangwala  •  Supervisor: Prof. Giuseppina Chesini</a:t>
             </a:r>
           </a:p>
-          <a:p>
-            <a:pPr algn="r">
-              <a:defRPr sz="900" b="1">
-                <a:solidFill>
-                  <a:srgbClr val="0F2043"/>
-                </a:solidFill>
-                <a:latin typeface="Calibri"/>
-              </a:defRPr>
-            </a:pPr>
-            <a:r>
-              <a:t>Slide 4 of 14</a:t>
-            </a:r>
-          </a:p>
         </p:txBody>
       </p:sp>
       <p:sp>
@@ -9909,8 +10027,8 @@
         </p:nvSpPr>
         <p:spPr>
           <a:xfrm>
-            <a:off x="731520" y="1463040"/>
-            <a:ext cx="5212080" cy="2286000"/>
+            <a:off x="731520" y="1371600"/>
+            <a:ext cx="5212080" cy="2331720"/>
           </a:xfrm>
           <a:prstGeom prst="roundRect">
             <a:avLst/>
@@ -9954,8 +10072,8 @@
         </p:nvSpPr>
         <p:spPr>
           <a:xfrm>
-            <a:off x="914400" y="1600200"/>
-            <a:ext cx="4846320" cy="2011680"/>
+            <a:off x="914400" y="1508760"/>
+            <a:ext cx="4846320" cy="2057400"/>
           </a:xfrm>
           <a:prstGeom prst="rect">
             <a:avLst/>
@@ -9972,7 +10090,7 @@
               <a:spcAft>
                 <a:spcPts val="400"/>
               </a:spcAft>
-              <a:defRPr sz="1300" b="1">
+              <a:defRPr sz="1250" b="1">
                 <a:solidFill>
                   <a:srgbClr val="0F2043"/>
                 </a:solidFill>
@@ -9986,11 +10104,11 @@
           <a:p>
             <a:pPr>
               <a:spcAft>
-                <a:spcPts val="600"/>
+                <a:spcPts val="500"/>
               </a:spcAft>
             </a:pPr>
             <a:r>
-              <a:rPr b="1" sz="1000">
+              <a:rPr b="1" sz="950">
                 <a:solidFill>
                   <a:srgbClr val="1E293B"/>
                 </a:solidFill>
@@ -9998,7 +10116,7 @@
               <a:t>Question: </a:t>
             </a:r>
             <a:r>
-              <a:rPr sz="1000">
+              <a:rPr sz="950">
                 <a:solidFill>
                   <a:srgbClr val="1E293B"/>
                 </a:solidFill>
@@ -10008,7 +10126,7 @@
           </a:p>
           <a:p>
             <a:r>
-              <a:rPr b="1" sz="1000">
+              <a:rPr b="1" sz="950">
                 <a:solidFill>
                   <a:srgbClr val="0F2043"/>
                 </a:solidFill>
@@ -10016,7 +10134,7 @@
               <a:t>Hypothesis: </a:t>
             </a:r>
             <a:r>
-              <a:rPr sz="1000" i="1">
+              <a:rPr sz="950" i="1">
                 <a:solidFill>
                   <a:srgbClr val="1E293B"/>
                 </a:solidFill>
@@ -10034,8 +10152,8 @@
         </p:nvSpPr>
         <p:spPr>
           <a:xfrm>
-            <a:off x="6248095" y="1463040"/>
-            <a:ext cx="5212080" cy="2286000"/>
+            <a:off x="6248095" y="1371600"/>
+            <a:ext cx="5212080" cy="2331720"/>
           </a:xfrm>
           <a:prstGeom prst="roundRect">
             <a:avLst/>
@@ -10079,8 +10197,8 @@
         </p:nvSpPr>
         <p:spPr>
           <a:xfrm>
-            <a:off x="6430975" y="1600200"/>
-            <a:ext cx="4846320" cy="2011680"/>
+            <a:off x="6430975" y="1508760"/>
+            <a:ext cx="4846320" cy="2057400"/>
           </a:xfrm>
           <a:prstGeom prst="rect">
             <a:avLst/>
@@ -10097,7 +10215,7 @@
               <a:spcAft>
                 <a:spcPts val="400"/>
               </a:spcAft>
-              <a:defRPr sz="1300" b="1">
+              <a:defRPr sz="1250" b="1">
                 <a:solidFill>
                   <a:srgbClr val="A51C30"/>
                 </a:solidFill>
@@ -10111,11 +10229,11 @@
           <a:p>
             <a:pPr>
               <a:spcAft>
-                <a:spcPts val="600"/>
+                <a:spcPts val="500"/>
               </a:spcAft>
             </a:pPr>
             <a:r>
-              <a:rPr b="1" sz="1000">
+              <a:rPr b="1" sz="950">
                 <a:solidFill>
                   <a:srgbClr val="1E293B"/>
                 </a:solidFill>
@@ -10123,7 +10241,7 @@
               <a:t>Question: </a:t>
             </a:r>
             <a:r>
-              <a:rPr sz="1000">
+              <a:rPr sz="950">
                 <a:solidFill>
                   <a:srgbClr val="1E293B"/>
                 </a:solidFill>
@@ -10133,7 +10251,7 @@
           </a:p>
           <a:p>
             <a:r>
-              <a:rPr b="1" sz="1000">
+              <a:rPr b="1" sz="950">
                 <a:solidFill>
                   <a:srgbClr val="A51C30"/>
                 </a:solidFill>
@@ -10141,7 +10259,7 @@
               <a:t>Hypothesis: </a:t>
             </a:r>
             <a:r>
-              <a:rPr sz="1000" i="1">
+              <a:rPr sz="950" i="1">
                 <a:solidFill>
                   <a:srgbClr val="1E293B"/>
                 </a:solidFill>
@@ -10159,8 +10277,8 @@
         </p:nvSpPr>
         <p:spPr>
           <a:xfrm>
-            <a:off x="731520" y="3931920"/>
-            <a:ext cx="5212080" cy="2286000"/>
+            <a:off x="731520" y="3886200"/>
+            <a:ext cx="5212080" cy="2331720"/>
           </a:xfrm>
           <a:prstGeom prst="roundRect">
             <a:avLst/>
@@ -10204,8 +10322,8 @@
         </p:nvSpPr>
         <p:spPr>
           <a:xfrm>
-            <a:off x="914400" y="4069080"/>
-            <a:ext cx="4846320" cy="2011680"/>
+            <a:off x="914400" y="4023360"/>
+            <a:ext cx="4846320" cy="2057400"/>
           </a:xfrm>
           <a:prstGeom prst="rect">
             <a:avLst/>
@@ -10222,7 +10340,7 @@
               <a:spcAft>
                 <a:spcPts val="400"/>
               </a:spcAft>
-              <a:defRPr sz="1300" b="1">
+              <a:defRPr sz="1250" b="1">
                 <a:solidFill>
                   <a:srgbClr val="D4AF37"/>
                 </a:solidFill>
@@ -10236,11 +10354,11 @@
           <a:p>
             <a:pPr>
               <a:spcAft>
-                <a:spcPts val="600"/>
+                <a:spcPts val="500"/>
               </a:spcAft>
             </a:pPr>
             <a:r>
-              <a:rPr b="1" sz="1000">
+              <a:rPr b="1" sz="950">
                 <a:solidFill>
                   <a:srgbClr val="1E293B"/>
                 </a:solidFill>
@@ -10248,7 +10366,7 @@
               <a:t>Question: </a:t>
             </a:r>
             <a:r>
-              <a:rPr sz="1000">
+              <a:rPr sz="950">
                 <a:solidFill>
                   <a:srgbClr val="1E293B"/>
                 </a:solidFill>
@@ -10258,7 +10376,7 @@
           </a:p>
           <a:p>
             <a:r>
-              <a:rPr b="1" sz="1000">
+              <a:rPr b="1" sz="950">
                 <a:solidFill>
                   <a:srgbClr val="D4AF37"/>
                 </a:solidFill>
@@ -10266,7 +10384,7 @@
               <a:t>Hypothesis: </a:t>
             </a:r>
             <a:r>
-              <a:rPr sz="1000" i="1">
+              <a:rPr sz="950" i="1">
                 <a:solidFill>
                   <a:srgbClr val="1E293B"/>
                 </a:solidFill>
@@ -10284,8 +10402,8 @@
         </p:nvSpPr>
         <p:spPr>
           <a:xfrm>
-            <a:off x="6248095" y="3931920"/>
-            <a:ext cx="5212080" cy="2286000"/>
+            <a:off x="6248095" y="3886200"/>
+            <a:ext cx="5212080" cy="2331720"/>
           </a:xfrm>
           <a:prstGeom prst="roundRect">
             <a:avLst/>
@@ -10329,8 +10447,8 @@
         </p:nvSpPr>
         <p:spPr>
           <a:xfrm>
-            <a:off x="6430975" y="4069080"/>
-            <a:ext cx="4846320" cy="2011680"/>
+            <a:off x="6430975" y="4023360"/>
+            <a:ext cx="4846320" cy="2057400"/>
           </a:xfrm>
           <a:prstGeom prst="rect">
             <a:avLst/>
@@ -10347,7 +10465,7 @@
               <a:spcAft>
                 <a:spcPts val="400"/>
               </a:spcAft>
-              <a:defRPr sz="1300" b="1">
+              <a:defRPr sz="1250" b="1">
                 <a:solidFill>
                   <a:srgbClr val="0F2043"/>
                 </a:solidFill>
@@ -10361,11 +10479,11 @@
           <a:p>
             <a:pPr>
               <a:spcAft>
-                <a:spcPts val="600"/>
+                <a:spcPts val="500"/>
               </a:spcAft>
             </a:pPr>
             <a:r>
-              <a:rPr b="1" sz="1000">
+              <a:rPr b="1" sz="950">
                 <a:solidFill>
                   <a:srgbClr val="1E293B"/>
                 </a:solidFill>
@@ -10373,7 +10491,7 @@
               <a:t>Question: </a:t>
             </a:r>
             <a:r>
-              <a:rPr sz="1000">
+              <a:rPr sz="950">
                 <a:solidFill>
                   <a:srgbClr val="1E293B"/>
                 </a:solidFill>
@@ -10383,7 +10501,7 @@
           </a:p>
           <a:p>
             <a:r>
-              <a:rPr b="1" sz="1000">
+              <a:rPr b="1" sz="950">
                 <a:solidFill>
                   <a:srgbClr val="0F2043"/>
                 </a:solidFill>
@@ -10391,7 +10509,7 @@
               <a:t>Hypothesis: </a:t>
             </a:r>
             <a:r>
-              <a:rPr sz="1000" i="1">
+              <a:rPr sz="950" i="1">
                 <a:solidFill>
                   <a:srgbClr val="1E293B"/>
                 </a:solidFill>
@@ -10435,7 +10553,7 @@
         </p:nvSpPr>
         <p:spPr>
           <a:xfrm>
-            <a:off x="731520" y="365760"/>
+            <a:off x="731520" y="320040"/>
             <a:ext cx="10728655" cy="822960"/>
           </a:xfrm>
           <a:prstGeom prst="rect">
@@ -10466,7 +10584,7 @@
           </a:p>
           <a:p>
             <a:pPr>
-              <a:defRPr sz="2200" b="1">
+              <a:defRPr sz="2100" b="1">
                 <a:solidFill>
                   <a:srgbClr val="0F2043"/>
                 </a:solidFill>
@@ -10474,7 +10592,7 @@
               </a:defRPr>
             </a:pPr>
             <a:r>
-              <a:t>Data Architecture: Point-in-Time Pipeline &amp; 59-Variable Taxonomy</a:t>
+              <a:t>Data Architecture: Point-in-Time Pipeline &amp; Feature Taxonomy</a:t>
             </a:r>
           </a:p>
         </p:txBody>
@@ -10487,7 +10605,7 @@
         </p:nvSpPr>
         <p:spPr>
           <a:xfrm>
-            <a:off x="731520" y="1234440"/>
+            <a:off x="731520" y="1188720"/>
             <a:ext cx="10728655" cy="36576"/>
           </a:xfrm>
           <a:prstGeom prst="rect">
@@ -10531,7 +10649,7 @@
         <p:spPr>
           <a:xfrm>
             <a:off x="731520" y="6446520"/>
-            <a:ext cx="10728655" cy="320040"/>
+            <a:ext cx="8686800" cy="320040"/>
           </a:xfrm>
           <a:prstGeom prst="rect">
             <a:avLst/>
@@ -10556,19 +10674,6 @@
               <a:t>University of Verona | Department of Economics  •  Murtuza Yusuf Rangwala  •  Supervisor: Prof. Giuseppina Chesini</a:t>
             </a:r>
           </a:p>
-          <a:p>
-            <a:pPr algn="r">
-              <a:defRPr sz="900" b="1">
-                <a:solidFill>
-                  <a:srgbClr val="0F2043"/>
-                </a:solidFill>
-                <a:latin typeface="Calibri"/>
-              </a:defRPr>
-            </a:pPr>
-            <a:r>
-              <a:t>Slide 5 of 14</a:t>
-            </a:r>
-          </a:p>
         </p:txBody>
       </p:sp>
       <p:sp>
@@ -10615,8 +10720,8 @@
         </p:nvSpPr>
         <p:spPr>
           <a:xfrm>
-            <a:off x="731520" y="1463040"/>
-            <a:ext cx="4114800" cy="4754880"/>
+            <a:off x="731520" y="1371600"/>
+            <a:ext cx="4937760" cy="4846320"/>
           </a:xfrm>
           <a:prstGeom prst="roundRect">
             <a:avLst/>
@@ -10660,8 +10765,8 @@
         </p:nvSpPr>
         <p:spPr>
           <a:xfrm>
-            <a:off x="914400" y="1645920"/>
-            <a:ext cx="3749039" cy="4389120"/>
+            <a:off x="914400" y="1554480"/>
+            <a:ext cx="4572000" cy="4480560"/>
           </a:xfrm>
           <a:prstGeom prst="rect">
             <a:avLst/>
@@ -10678,7 +10783,7 @@
               <a:spcAft>
                 <a:spcPts val="800"/>
               </a:spcAft>
-              <a:defRPr sz="1400" b="1">
+              <a:defRPr sz="1350" b="1">
                 <a:solidFill>
                   <a:srgbClr val="0F2043"/>
                 </a:solidFill>
@@ -10692,7 +10797,7 @@
           <a:p>
             <a:pPr>
               <a:spcAft>
-                <a:spcPts val="800"/>
+                <a:spcPts val="600"/>
               </a:spcAft>
             </a:pPr>
             <a:r>
@@ -10704,7 +10809,7 @@
               <a:t>• Bloomberg Point-in-Time: </a:t>
             </a:r>
             <a:r>
-              <a:rPr sz="1000">
+              <a:rPr sz="950">
                 <a:solidFill>
                   <a:srgbClr val="1E293B"/>
                 </a:solidFill>
@@ -10715,7 +10820,7 @@
           <a:p>
             <a:pPr>
               <a:spcAft>
-                <a:spcPts val="800"/>
+                <a:spcPts val="600"/>
               </a:spcAft>
             </a:pPr>
             <a:r>
@@ -10727,7 +10832,7 @@
               <a:t>• 90-Day Fundamental Staleness Cap: </a:t>
             </a:r>
             <a:r>
-              <a:rPr sz="1000">
+              <a:rPr sz="950">
                 <a:solidFill>
                   <a:srgbClr val="1E293B"/>
                 </a:solidFill>
@@ -10738,7 +10843,7 @@
           <a:p>
             <a:pPr>
               <a:spcAft>
-                <a:spcPts val="800"/>
+                <a:spcPts val="600"/>
               </a:spcAft>
             </a:pPr>
             <a:r>
@@ -10750,7 +10855,7 @@
               <a:t>• Cross-Sectional Winsorization: </a:t>
             </a:r>
             <a:r>
-              <a:rPr sz="1000">
+              <a:rPr sz="950">
                 <a:solidFill>
                   <a:srgbClr val="1E293B"/>
                 </a:solidFill>
@@ -10761,7 +10866,7 @@
           <a:p>
             <a:pPr>
               <a:spcAft>
-                <a:spcPts val="800"/>
+                <a:spcPts val="600"/>
               </a:spcAft>
             </a:pPr>
             <a:r>
@@ -10773,7 +10878,7 @@
               <a:t>• Z-Score Standard Normalization: </a:t>
             </a:r>
             <a:r>
-              <a:rPr sz="1000">
+              <a:rPr sz="950">
                 <a:solidFill>
                   <a:srgbClr val="1E293B"/>
                 </a:solidFill>
@@ -10781,6 +10886,29 @@
               <a:t> Daily cross-sectional standard scaling ($\mu=0, \sigma=1$) across all input features for spatial invariant training.</a:t>
             </a:r>
           </a:p>
+          <a:p>
+            <a:pPr>
+              <a:spcAft>
+                <a:spcPts val="600"/>
+              </a:spcAft>
+            </a:pPr>
+            <a:r>
+              <a:rPr b="1" sz="1050">
+                <a:solidFill>
+                  <a:srgbClr val="0F2043"/>
+                </a:solidFill>
+              </a:rPr>
+              <a:t>• 59-Variable Structure: </a:t>
+            </a:r>
+            <a:r>
+              <a:rPr sz="950">
+                <a:solidFill>
+                  <a:srgbClr val="1E293B"/>
+                </a:solidFill>
+              </a:rPr>
+              <a:t> 53 machine learning inputs (Accounting, Technical, Macro) + 6 Fama-French &amp; Carhart asset pricing betas.</a:t>
+            </a:r>
+          </a:p>
         </p:txBody>
       </p:sp>
       <p:sp>
@@ -10791,8 +10919,8 @@
         </p:nvSpPr>
         <p:spPr>
           <a:xfrm>
-            <a:off x="5120640" y="1463040"/>
-            <a:ext cx="6339535" cy="4754880"/>
+            <a:off x="5943600" y="1371600"/>
+            <a:ext cx="5516575" cy="4846320"/>
           </a:xfrm>
           <a:prstGeom prst="roundRect">
             <a:avLst/>
@@ -10802,7 +10930,7 @@
           </a:solidFill>
           <a:ln w="19050">
             <a:solidFill>
-              <a:srgbClr val="E2E8F0"/>
+              <a:srgbClr val="D4AF37"/>
             </a:solidFill>
           </a:ln>
         </p:spPr>
@@ -10836,8 +10964,8 @@
         </p:nvSpPr>
         <p:spPr>
           <a:xfrm>
-            <a:off x="5303520" y="1645920"/>
-            <a:ext cx="5973775" cy="4389120"/>
+            <a:off x="6080760" y="1463040"/>
+            <a:ext cx="5242255" cy="320040"/>
           </a:xfrm>
           <a:prstGeom prst="rect">
             <a:avLst/>
@@ -10845,124 +10973,49 @@
           <a:noFill/>
         </p:spPr>
         <p:txBody>
-          <a:bodyPr wrap="square">
+          <a:bodyPr wrap="square" lIns="0" tIns="0" rIns="0" bIns="0">
             <a:spAutoFit/>
           </a:bodyPr>
           <a:lstStyle/>
           <a:p>
-            <a:pPr>
-              <a:spcAft>
-                <a:spcPts val="800"/>
-              </a:spcAft>
-              <a:defRPr sz="1400" b="1">
-                <a:solidFill>
-                  <a:srgbClr val="A51C30"/>
+            <a:pPr algn="ctr">
+              <a:defRPr sz="1100" b="1">
+                <a:solidFill>
+                  <a:srgbClr val="0F2043"/>
                 </a:solidFill>
                 <a:latin typeface="Arial"/>
               </a:defRPr>
             </a:pPr>
             <a:r>
-              <a:t>59-Variable Feature Taxonomy Structure</a:t>
-            </a:r>
-          </a:p>
-          <a:p>
-            <a:pPr>
-              <a:spcAft>
-                <a:spcPts val="600"/>
-              </a:spcAft>
-            </a:pPr>
-            <a:r>
-              <a:rPr b="1" sz="1100">
-                <a:solidFill>
-                  <a:srgbClr val="0F2043"/>
-                </a:solidFill>
-              </a:rPr>
-              <a:t>■ Accounting &amp; Valuation (20 Variables)
-</a:t>
-            </a:r>
-            <a:r>
-              <a:rPr sz="950">
-                <a:solidFill>
-                  <a:srgbClr val="1E293B"/>
-                </a:solidFill>
-              </a:rPr>
-              <a:t>P/E, P/B, EV/EBITDA, Debt/Equity, Free Cash Flow Yield, Return on Invested Capital (ROIC), Operating Margin, Asset Turnover, Earnings Quality Ratios.</a:t>
-            </a:r>
-          </a:p>
-          <a:p>
-            <a:pPr>
-              <a:spcAft>
-                <a:spcPts val="600"/>
-              </a:spcAft>
-            </a:pPr>
-            <a:r>
-              <a:rPr b="1" sz="1100">
-                <a:solidFill>
-                  <a:srgbClr val="A51C30"/>
-                </a:solidFill>
-              </a:rPr>
-              <a:t>■ Technical &amp; Momentum Dynamics (20 Variables)
-</a:t>
-            </a:r>
-            <a:r>
-              <a:rPr sz="950">
-                <a:solidFill>
-                  <a:srgbClr val="1E293B"/>
-                </a:solidFill>
-              </a:rPr>
-              <a:t>RSI-14, MACD Signal, 20d/50d/200d Moving Average Ratios, Realized Volatility 20d/60d, Average True Range (ATR), Volume Momentum, 1M/3M/12M Price Return Residuals.</a:t>
-            </a:r>
-          </a:p>
-          <a:p>
-            <a:pPr>
-              <a:spcAft>
-                <a:spcPts val="600"/>
-              </a:spcAft>
-            </a:pPr>
-            <a:r>
-              <a:rPr b="1" sz="1100">
-                <a:solidFill>
-                  <a:srgbClr val="D4AF37"/>
-                </a:solidFill>
-              </a:rPr>
-              <a:t>■ Macroeconomic Gating Features (13 Variables)
-</a:t>
-            </a:r>
-            <a:r>
-              <a:rPr sz="950">
-                <a:solidFill>
-                  <a:srgbClr val="1E293B"/>
-                </a:solidFill>
-              </a:rPr>
-              <a:t>VIX Volatility Index, 10Y-2Y Treasury Yield Spread, Fed Funds Rate, US Dollar Index (DXY), High Yield Credit Spread, Crude Oil &amp; Commodity Indices, Inflation Expectations.</a:t>
-            </a:r>
-          </a:p>
-          <a:p>
-            <a:pPr>
-              <a:spcAft>
-                <a:spcPts val="600"/>
-              </a:spcAft>
-            </a:pPr>
-            <a:r>
-              <a:rPr b="1" sz="1100">
-                <a:solidFill>
-                  <a:srgbClr val="1E293B"/>
-                </a:solidFill>
-              </a:rPr>
-              <a:t>■ Asset Pricing Betas (6 Benchmark Factors)
-</a:t>
-            </a:r>
-            <a:r>
-              <a:rPr sz="950">
-                <a:solidFill>
-                  <a:srgbClr val="1E293B"/>
-                </a:solidFill>
-              </a:rPr>
-              <a:t>Fama-French 5 Factors (Market-RF, SMB, HML, RMW, CMA) + Carhart Momentum (MOM) estimated via 252-day rolling window regressions.</a:t>
-            </a:r>
-          </a:p>
-        </p:txBody>
-      </p:sp>
+              <a:t>Figure 3.1: Empirical Feature Importance Distribution (59 Variables)</a:t>
+            </a:r>
+          </a:p>
+        </p:txBody>
+      </p:sp>
+      <p:pic>
+        <p:nvPicPr>
+          <p:cNvPr id="10" name="Picture 9" descr="selected_feature_importances.png"/>
+          <p:cNvPicPr>
+            <a:picLocks noChangeAspect="1"/>
+          </p:cNvPicPr>
+          <p:nvPr/>
+        </p:nvPicPr>
+        <p:blipFill>
+          <a:blip r:embed="rId2"/>
+          <a:stretch>
+            <a:fillRect/>
+          </a:stretch>
+        </p:blipFill>
+        <p:spPr>
+          <a:xfrm>
+            <a:off x="6126480" y="1825874"/>
+            <a:ext cx="5150815" cy="4120652"/>
+          </a:xfrm>
+          <a:prstGeom prst="rect">
+            <a:avLst/>
+          </a:prstGeom>
+        </p:spPr>
+      </p:pic>
     </p:spTree>
   </p:cSld>
   <p:clrMapOvr>
@@ -10997,7 +11050,7 @@
         </p:nvSpPr>
         <p:spPr>
           <a:xfrm>
-            <a:off x="731520" y="365760"/>
+            <a:off x="731520" y="320040"/>
             <a:ext cx="10728655" cy="822960"/>
           </a:xfrm>
           <a:prstGeom prst="rect">
@@ -11028,7 +11081,7 @@
           </a:p>
           <a:p>
             <a:pPr>
-              <a:defRPr sz="2200" b="1">
+              <a:defRPr sz="2100" b="1">
                 <a:solidFill>
                   <a:srgbClr val="0F2043"/>
                 </a:solidFill>
@@ -11049,7 +11102,7 @@
         </p:nvSpPr>
         <p:spPr>
           <a:xfrm>
-            <a:off x="731520" y="1234440"/>
+            <a:off x="731520" y="1188720"/>
             <a:ext cx="10728655" cy="36576"/>
           </a:xfrm>
           <a:prstGeom prst="rect">
@@ -11093,7 +11146,7 @@
         <p:spPr>
           <a:xfrm>
             <a:off x="731520" y="6446520"/>
-            <a:ext cx="10728655" cy="320040"/>
+            <a:ext cx="8686800" cy="320040"/>
           </a:xfrm>
           <a:prstGeom prst="rect">
             <a:avLst/>
@@ -11118,19 +11171,6 @@
               <a:t>University of Verona | Department of Economics  •  Murtuza Yusuf Rangwala  •  Supervisor: Prof. Giuseppina Chesini</a:t>
             </a:r>
           </a:p>
-          <a:p>
-            <a:pPr algn="r">
-              <a:defRPr sz="900" b="1">
-                <a:solidFill>
-                  <a:srgbClr val="0F2043"/>
-                </a:solidFill>
-                <a:latin typeface="Calibri"/>
-              </a:defRPr>
-            </a:pPr>
-            <a:r>
-              <a:t>Slide 6 of 14</a:t>
-            </a:r>
-          </a:p>
         </p:txBody>
       </p:sp>
       <p:sp>
@@ -11177,8 +11217,8 @@
         </p:nvSpPr>
         <p:spPr>
           <a:xfrm>
-            <a:off x="731520" y="1371600"/>
-            <a:ext cx="10728655" cy="365760"/>
+            <a:off x="731520" y="1325880"/>
+            <a:ext cx="10728655" cy="320040"/>
           </a:xfrm>
           <a:prstGeom prst="rect">
             <a:avLst/>
@@ -11192,7 +11232,7 @@
           <a:lstStyle/>
           <a:p>
             <a:pPr>
-              <a:defRPr sz="1300" b="1">
+              <a:defRPr sz="1250" b="1">
                 <a:solidFill>
                   <a:srgbClr val="0F2043"/>
                 </a:solidFill>
@@ -11213,7 +11253,7 @@
         </p:nvSpPr>
         <p:spPr>
           <a:xfrm>
-            <a:off x="731520" y="1737360"/>
+            <a:off x="731520" y="1691640"/>
             <a:ext cx="2011680" cy="1234440"/>
           </a:xfrm>
           <a:prstGeom prst="roundRect">
@@ -11258,7 +11298,7 @@
         </p:nvSpPr>
         <p:spPr>
           <a:xfrm>
-            <a:off x="822960" y="1828800"/>
+            <a:off x="822960" y="1783080"/>
             <a:ext cx="1828800" cy="1051560"/>
           </a:xfrm>
           <a:prstGeom prst="rect">
@@ -11333,7 +11373,7 @@
         </p:nvSpPr>
         <p:spPr>
           <a:xfrm>
-            <a:off x="2907792" y="1737360"/>
+            <a:off x="2907792" y="1691640"/>
             <a:ext cx="2011680" cy="1234440"/>
           </a:xfrm>
           <a:prstGeom prst="roundRect">
@@ -11378,7 +11418,7 @@
         </p:nvSpPr>
         <p:spPr>
           <a:xfrm>
-            <a:off x="2999232" y="1828800"/>
+            <a:off x="2999232" y="1783080"/>
             <a:ext cx="1828800" cy="1051560"/>
           </a:xfrm>
           <a:prstGeom prst="rect">
@@ -11453,7 +11493,7 @@
         </p:nvSpPr>
         <p:spPr>
           <a:xfrm>
-            <a:off x="5084064" y="1737360"/>
+            <a:off x="5084064" y="1691640"/>
             <a:ext cx="2011680" cy="1234440"/>
           </a:xfrm>
           <a:prstGeom prst="roundRect">
@@ -11498,7 +11538,7 @@
         </p:nvSpPr>
         <p:spPr>
           <a:xfrm>
-            <a:off x="5175504" y="1828800"/>
+            <a:off x="5175504" y="1783080"/>
             <a:ext cx="1828800" cy="1051560"/>
           </a:xfrm>
           <a:prstGeom prst="rect">
@@ -11573,7 +11613,7 @@
         </p:nvSpPr>
         <p:spPr>
           <a:xfrm>
-            <a:off x="7260336" y="1737360"/>
+            <a:off x="7260336" y="1691640"/>
             <a:ext cx="2011680" cy="1234440"/>
           </a:xfrm>
           <a:prstGeom prst="roundRect">
@@ -11618,7 +11658,7 @@
         </p:nvSpPr>
         <p:spPr>
           <a:xfrm>
-            <a:off x="7351776" y="1828800"/>
+            <a:off x="7351776" y="1783080"/>
             <a:ext cx="1828800" cy="1051560"/>
           </a:xfrm>
           <a:prstGeom prst="rect">
@@ -11693,7 +11733,7 @@
         </p:nvSpPr>
         <p:spPr>
           <a:xfrm>
-            <a:off x="9436608" y="1737360"/>
+            <a:off x="9436608" y="1691640"/>
             <a:ext cx="2011680" cy="1234440"/>
           </a:xfrm>
           <a:prstGeom prst="roundRect">
@@ -11738,7 +11778,7 @@
         </p:nvSpPr>
         <p:spPr>
           <a:xfrm>
-            <a:off x="9528048" y="1828800"/>
+            <a:off x="9528048" y="1783080"/>
             <a:ext cx="1828800" cy="1051560"/>
           </a:xfrm>
           <a:prstGeom prst="rect">
@@ -11814,8 +11854,8 @@
           <p:nvPr/>
         </p:nvGraphicFramePr>
         <p:xfrm>
-          <a:off x="731520" y="3200400"/>
-          <a:ext cx="10728655" cy="3017520"/>
+          <a:off x="731520" y="3154680"/>
+          <a:ext cx="10728655" cy="3063240"/>
         </p:xfrm>
         <a:graphic>
           <a:graphicData uri="http://schemas.openxmlformats.org/drawingml/2006/table">
@@ -11829,14 +11869,14 @@
                 <a:gridCol w="2743200"/>
                 <a:gridCol w="2499055"/>
               </a:tblGrid>
-              <a:tr h="603504">
+              <a:tr h="612648">
                 <a:tc>
                   <a:txBody>
                     <a:bodyPr/>
                     <a:lstStyle/>
                     <a:p>
                       <a:pPr algn="ctr">
-                        <a:defRPr sz="1100" b="1">
+                        <a:defRPr sz="1050" b="1">
                           <a:solidFill>
                             <a:srgbClr val="FFFFFF"/>
                           </a:solidFill>
@@ -11860,7 +11900,7 @@
                     <a:lstStyle/>
                     <a:p>
                       <a:pPr algn="ctr">
-                        <a:defRPr sz="1100" b="1">
+                        <a:defRPr sz="1050" b="1">
                           <a:solidFill>
                             <a:srgbClr val="FFFFFF"/>
                           </a:solidFill>
@@ -11884,7 +11924,7 @@
                     <a:lstStyle/>
                     <a:p>
                       <a:pPr algn="ctr">
-                        <a:defRPr sz="1100" b="1">
+                        <a:defRPr sz="1050" b="1">
                           <a:solidFill>
                             <a:srgbClr val="FFFFFF"/>
                           </a:solidFill>
@@ -11908,7 +11948,7 @@
                     <a:lstStyle/>
                     <a:p>
                       <a:pPr algn="ctr">
-                        <a:defRPr sz="1100" b="1">
+                        <a:defRPr sz="1050" b="1">
                           <a:solidFill>
                             <a:srgbClr val="FFFFFF"/>
                           </a:solidFill>
@@ -11927,14 +11967,14 @@
                   </a:tcPr>
                 </a:tc>
               </a:tr>
-              <a:tr h="603504">
+              <a:tr h="612648">
                 <a:tc>
                   <a:txBody>
                     <a:bodyPr/>
                     <a:lstStyle/>
                     <a:p>
                       <a:pPr algn="l">
-                        <a:defRPr sz="1050" b="1">
+                        <a:defRPr sz="1000" b="1">
                           <a:solidFill>
                             <a:srgbClr val="0F2043"/>
                           </a:solidFill>
@@ -11958,7 +11998,7 @@
                     <a:lstStyle/>
                     <a:p>
                       <a:pPr algn="ctr">
-                        <a:defRPr sz="1050">
+                        <a:defRPr sz="1000">
                           <a:solidFill>
                             <a:srgbClr val="1E293B"/>
                           </a:solidFill>
@@ -11982,7 +12022,7 @@
                     <a:lstStyle/>
                     <a:p>
                       <a:pPr algn="ctr">
-                        <a:defRPr sz="1050">
+                        <a:defRPr sz="1000">
                           <a:solidFill>
                             <a:srgbClr val="1E293B"/>
                           </a:solidFill>
@@ -12006,7 +12046,7 @@
                     <a:lstStyle/>
                     <a:p>
                       <a:pPr algn="ctr">
-                        <a:defRPr sz="1050">
+                        <a:defRPr sz="1000">
                           <a:solidFill>
                             <a:srgbClr val="1E293B"/>
                           </a:solidFill>
@@ -12025,14 +12065,14 @@
                   </a:tcPr>
                 </a:tc>
               </a:tr>
-              <a:tr h="603504">
+              <a:tr h="612648">
                 <a:tc>
                   <a:txBody>
                     <a:bodyPr/>
                     <a:lstStyle/>
                     <a:p>
                       <a:pPr algn="l">
-                        <a:defRPr sz="1050" b="1">
+                        <a:defRPr sz="1000" b="1">
                           <a:solidFill>
                             <a:srgbClr val="0F2043"/>
                           </a:solidFill>
@@ -12056,7 +12096,7 @@
                     <a:lstStyle/>
                     <a:p>
                       <a:pPr algn="ctr">
-                        <a:defRPr sz="1050">
+                        <a:defRPr sz="1000">
                           <a:solidFill>
                             <a:srgbClr val="1E293B"/>
                           </a:solidFill>
@@ -12080,7 +12120,7 @@
                     <a:lstStyle/>
                     <a:p>
                       <a:pPr algn="ctr">
-                        <a:defRPr sz="1050">
+                        <a:defRPr sz="1000">
                           <a:solidFill>
                             <a:srgbClr val="1E293B"/>
                           </a:solidFill>
@@ -12104,7 +12144,7 @@
                     <a:lstStyle/>
                     <a:p>
                       <a:pPr algn="ctr">
-                        <a:defRPr sz="1050">
+                        <a:defRPr sz="1000">
                           <a:solidFill>
                             <a:srgbClr val="1E293B"/>
                           </a:solidFill>
@@ -12123,14 +12163,14 @@
                   </a:tcPr>
                 </a:tc>
               </a:tr>
-              <a:tr h="603504">
+              <a:tr h="612648">
                 <a:tc>
                   <a:txBody>
                     <a:bodyPr/>
                     <a:lstStyle/>
                     <a:p>
                       <a:pPr algn="l">
-                        <a:defRPr sz="1050" b="1">
+                        <a:defRPr sz="1000" b="1">
                           <a:solidFill>
                             <a:srgbClr val="0F2043"/>
                           </a:solidFill>
@@ -12154,7 +12194,7 @@
                     <a:lstStyle/>
                     <a:p>
                       <a:pPr algn="ctr">
-                        <a:defRPr sz="1050">
+                        <a:defRPr sz="1000">
                           <a:solidFill>
                             <a:srgbClr val="1E293B"/>
                           </a:solidFill>
@@ -12178,7 +12218,7 @@
                     <a:lstStyle/>
                     <a:p>
                       <a:pPr algn="ctr">
-                        <a:defRPr sz="1050">
+                        <a:defRPr sz="1000">
                           <a:solidFill>
                             <a:srgbClr val="1E293B"/>
                           </a:solidFill>
@@ -12202,7 +12242,7 @@
                     <a:lstStyle/>
                     <a:p>
                       <a:pPr algn="ctr">
-                        <a:defRPr sz="1050">
+                        <a:defRPr sz="1000">
                           <a:solidFill>
                             <a:srgbClr val="1E293B"/>
                           </a:solidFill>
@@ -12221,14 +12261,14 @@
                   </a:tcPr>
                 </a:tc>
               </a:tr>
-              <a:tr h="603504">
+              <a:tr h="612648">
                 <a:tc>
                   <a:txBody>
                     <a:bodyPr/>
                     <a:lstStyle/>
                     <a:p>
                       <a:pPr algn="l">
-                        <a:defRPr sz="1050" b="1">
+                        <a:defRPr sz="1000" b="1">
                           <a:solidFill>
                             <a:srgbClr val="0F2043"/>
                           </a:solidFill>
@@ -12252,7 +12292,7 @@
                     <a:lstStyle/>
                     <a:p>
                       <a:pPr algn="ctr">
-                        <a:defRPr sz="1050">
+                        <a:defRPr sz="1000">
                           <a:solidFill>
                             <a:srgbClr val="1E293B"/>
                           </a:solidFill>
@@ -12276,7 +12316,7 @@
                     <a:lstStyle/>
                     <a:p>
                       <a:pPr algn="ctr">
-                        <a:defRPr sz="1050">
+                        <a:defRPr sz="1000">
                           <a:solidFill>
                             <a:srgbClr val="1E293B"/>
                           </a:solidFill>
@@ -12300,7 +12340,7 @@
                     <a:lstStyle/>
                     <a:p>
                       <a:pPr algn="ctr">
-                        <a:defRPr sz="1050">
+                        <a:defRPr sz="1000">
                           <a:solidFill>
                             <a:srgbClr val="1E293B"/>
                           </a:solidFill>
@@ -12357,7 +12397,7 @@
         </p:nvSpPr>
         <p:spPr>
           <a:xfrm>
-            <a:off x="731520" y="365760"/>
+            <a:off x="731520" y="320040"/>
             <a:ext cx="10728655" cy="822960"/>
           </a:xfrm>
           <a:prstGeom prst="rect">
@@ -12388,7 +12428,7 @@
           </a:p>
           <a:p>
             <a:pPr>
-              <a:defRPr sz="2200" b="1">
+              <a:defRPr sz="2100" b="1">
                 <a:solidFill>
                   <a:srgbClr val="0F2043"/>
                 </a:solidFill>
@@ -12409,7 +12449,7 @@
         </p:nvSpPr>
         <p:spPr>
           <a:xfrm>
-            <a:off x="731520" y="1234440"/>
+            <a:off x="731520" y="1188720"/>
             <a:ext cx="10728655" cy="36576"/>
           </a:xfrm>
           <a:prstGeom prst="rect">
@@ -12453,7 +12493,7 @@
         <p:spPr>
           <a:xfrm>
             <a:off x="731520" y="6446520"/>
-            <a:ext cx="10728655" cy="320040"/>
+            <a:ext cx="8686800" cy="320040"/>
           </a:xfrm>
           <a:prstGeom prst="rect">
             <a:avLst/>
@@ -12478,19 +12518,6 @@
               <a:t>University of Verona | Department of Economics  •  Murtuza Yusuf Rangwala  •  Supervisor: Prof. Giuseppina Chesini</a:t>
             </a:r>
           </a:p>
-          <a:p>
-            <a:pPr algn="r">
-              <a:defRPr sz="900" b="1">
-                <a:solidFill>
-                  <a:srgbClr val="0F2043"/>
-                </a:solidFill>
-                <a:latin typeface="Calibri"/>
-              </a:defRPr>
-            </a:pPr>
-            <a:r>
-              <a:t>Slide 7 of 14</a:t>
-            </a:r>
-          </a:p>
         </p:txBody>
       </p:sp>
       <p:sp>
@@ -12537,7 +12564,7 @@
         </p:nvSpPr>
         <p:spPr>
           <a:xfrm>
-            <a:off x="731520" y="1463040"/>
+            <a:off x="731520" y="1371600"/>
             <a:ext cx="3383280" cy="3291840"/>
           </a:xfrm>
           <a:prstGeom prst="roundRect">
@@ -12582,7 +12609,7 @@
         </p:nvSpPr>
         <p:spPr>
           <a:xfrm>
-            <a:off x="914400" y="1600200"/>
+            <a:off x="914400" y="1508760"/>
             <a:ext cx="3017520" cy="3017520"/>
           </a:xfrm>
           <a:prstGeom prst="rect">
@@ -12600,7 +12627,7 @@
               <a:spcAft>
                 <a:spcPts val="600"/>
               </a:spcAft>
-              <a:defRPr sz="1300" b="1">
+              <a:defRPr sz="1250" b="1">
                 <a:solidFill>
                   <a:srgbClr val="0F2043"/>
                 </a:solidFill>
@@ -12690,7 +12717,7 @@
         </p:nvSpPr>
         <p:spPr>
           <a:xfrm>
-            <a:off x="4389120" y="1463040"/>
+            <a:off x="4389120" y="1371600"/>
             <a:ext cx="3383280" cy="3291840"/>
           </a:xfrm>
           <a:prstGeom prst="roundRect">
@@ -12735,7 +12762,7 @@
         </p:nvSpPr>
         <p:spPr>
           <a:xfrm>
-            <a:off x="4572000" y="1600200"/>
+            <a:off x="4572000" y="1508760"/>
             <a:ext cx="3017520" cy="3017520"/>
           </a:xfrm>
           <a:prstGeom prst="rect">
@@ -12753,7 +12780,7 @@
               <a:spcAft>
                 <a:spcPts val="600"/>
               </a:spcAft>
-              <a:defRPr sz="1300" b="1">
+              <a:defRPr sz="1250" b="1">
                 <a:solidFill>
                   <a:srgbClr val="A51C30"/>
                 </a:solidFill>
@@ -12843,7 +12870,7 @@
         </p:nvSpPr>
         <p:spPr>
           <a:xfrm>
-            <a:off x="8046720" y="1463040"/>
+            <a:off x="8046720" y="1371600"/>
             <a:ext cx="3383280" cy="3291840"/>
           </a:xfrm>
           <a:prstGeom prst="roundRect">
@@ -12888,7 +12915,7 @@
         </p:nvSpPr>
         <p:spPr>
           <a:xfrm>
-            <a:off x="8229600" y="1600200"/>
+            <a:off x="8229600" y="1508760"/>
             <a:ext cx="3017520" cy="3017520"/>
           </a:xfrm>
           <a:prstGeom prst="rect">
@@ -12906,7 +12933,7 @@
               <a:spcAft>
                 <a:spcPts val="600"/>
               </a:spcAft>
-              <a:defRPr sz="1300" b="1">
+              <a:defRPr sz="1250" b="1">
                 <a:solidFill>
                   <a:srgbClr val="0F2043"/>
                 </a:solidFill>
@@ -12996,8 +13023,8 @@
         </p:nvSpPr>
         <p:spPr>
           <a:xfrm>
-            <a:off x="731520" y="4892040"/>
-            <a:ext cx="10728655" cy="1371600"/>
+            <a:off x="731520" y="4800600"/>
+            <a:ext cx="10728655" cy="1417320"/>
           </a:xfrm>
           <a:prstGeom prst="roundRect">
             <a:avLst/>
@@ -13041,8 +13068,8 @@
         </p:nvSpPr>
         <p:spPr>
           <a:xfrm>
-            <a:off x="914400" y="5029200"/>
-            <a:ext cx="10362895" cy="1097280"/>
+            <a:off x="914400" y="4937760"/>
+            <a:ext cx="10362895" cy="1143000"/>
           </a:xfrm>
           <a:prstGeom prst="rect">
             <a:avLst/>
@@ -13088,7 +13115,7 @@
           </a:p>
           <a:p>
             <a:pPr>
-              <a:defRPr sz="1000">
+              <a:defRPr sz="950">
                 <a:solidFill>
                   <a:srgbClr val="1E293B"/>
                 </a:solidFill>
@@ -13135,7 +13162,7 @@
         </p:nvSpPr>
         <p:spPr>
           <a:xfrm>
-            <a:off x="731520" y="365760"/>
+            <a:off x="731520" y="320040"/>
             <a:ext cx="10728655" cy="822960"/>
           </a:xfrm>
           <a:prstGeom prst="rect">
@@ -13166,7 +13193,7 @@
           </a:p>
           <a:p>
             <a:pPr>
-              <a:defRPr sz="2200" b="1">
+              <a:defRPr sz="2100" b="1">
                 <a:solidFill>
                   <a:srgbClr val="0F2043"/>
                 </a:solidFill>
@@ -13174,7 +13201,7 @@
               </a:defRPr>
             </a:pPr>
             <a:r>
-              <a:t>Empirical Performance: Out-of-Sample Results &amp; Diebold-Mariano Test</a:t>
+              <a:t>Empirical Performance: Out-of-Sample Results &amp; Equity Curves</a:t>
             </a:r>
           </a:p>
         </p:txBody>
@@ -13187,7 +13214,7 @@
         </p:nvSpPr>
         <p:spPr>
           <a:xfrm>
-            <a:off x="731520" y="1234440"/>
+            <a:off x="731520" y="1188720"/>
             <a:ext cx="10728655" cy="36576"/>
           </a:xfrm>
           <a:prstGeom prst="rect">
@@ -13231,7 +13258,7 @@
         <p:spPr>
           <a:xfrm>
             <a:off x="731520" y="6446520"/>
-            <a:ext cx="10728655" cy="320040"/>
+            <a:ext cx="8686800" cy="320040"/>
           </a:xfrm>
           <a:prstGeom prst="rect">
             <a:avLst/>
@@ -13254,19 +13281,6 @@
             </a:pPr>
             <a:r>
               <a:t>University of Verona | Department of Economics  •  Murtuza Yusuf Rangwala  •  Supervisor: Prof. Giuseppina Chesini</a:t>
-            </a:r>
-          </a:p>
-          <a:p>
-            <a:pPr algn="r">
-              <a:defRPr sz="900" b="1">
-                <a:solidFill>
-                  <a:srgbClr val="0F2043"/>
-                </a:solidFill>
-                <a:latin typeface="Calibri"/>
-              </a:defRPr>
-            </a:pPr>
-            <a:r>
-              <a:t>Slide 8 of 14</a:t>
             </a:r>
           </a:p>
         </p:txBody>
@@ -13316,8 +13330,8 @@
           <p:nvPr/>
         </p:nvGraphicFramePr>
         <p:xfrm>
-          <a:off x="731520" y="1463040"/>
-          <a:ext cx="6858000" cy="4663440"/>
+          <a:off x="731520" y="1371600"/>
+          <a:ext cx="4937760" cy="2468880"/>
         </p:xfrm>
         <a:graphic>
           <a:graphicData uri="http://schemas.openxmlformats.org/drawingml/2006/table">
@@ -13326,21 +13340,21 @@
                 <a:tableStyleId>{5C22544A-7EE6-4342-B048-85BDC9FD1C3A}</a:tableStyleId>
               </a:tblPr>
               <a:tblGrid>
-                <a:gridCol w="1828800"/>
-                <a:gridCol w="1005840"/>
-                <a:gridCol w="1005840"/>
-                <a:gridCol w="1005840"/>
-                <a:gridCol w="1005840"/>
-                <a:gridCol w="1005840"/>
+                <a:gridCol w="1463040"/>
+                <a:gridCol w="694944"/>
+                <a:gridCol w="694944"/>
+                <a:gridCol w="694944"/>
+                <a:gridCol w="694944"/>
+                <a:gridCol w="694944"/>
               </a:tblGrid>
-              <a:tr h="932688">
+              <a:tr h="493776">
                 <a:tc>
                   <a:txBody>
                     <a:bodyPr/>
                     <a:lstStyle/>
                     <a:p>
                       <a:pPr algn="ctr">
-                        <a:defRPr sz="1100" b="1">
+                        <a:defRPr sz="1050" b="1">
                           <a:solidFill>
                             <a:srgbClr val="FFFFFF"/>
                           </a:solidFill>
@@ -13348,7 +13362,7 @@
                         </a:defRPr>
                       </a:pPr>
                       <a:r>
-                        <a:t>Model Name</a:t>
+                        <a:t>Model</a:t>
                       </a:r>
                     </a:p>
                   </a:txBody>
@@ -13364,7 +13378,7 @@
                     <a:lstStyle/>
                     <a:p>
                       <a:pPr algn="ctr">
-                        <a:defRPr sz="1100" b="1">
+                        <a:defRPr sz="1050" b="1">
                           <a:solidFill>
                             <a:srgbClr val="FFFFFF"/>
                           </a:solidFill>
@@ -13388,7 +13402,7 @@
                     <a:lstStyle/>
                     <a:p>
                       <a:pPr algn="ctr">
-                        <a:defRPr sz="1100" b="1">
+                        <a:defRPr sz="1050" b="1">
                           <a:solidFill>
                             <a:srgbClr val="FFFFFF"/>
                           </a:solidFill>
@@ -13412,7 +13426,7 @@
                     <a:lstStyle/>
                     <a:p>
                       <a:pPr algn="ctr">
-                        <a:defRPr sz="1100" b="1">
+                        <a:defRPr sz="1050" b="1">
                           <a:solidFill>
                             <a:srgbClr val="FFFFFF"/>
                           </a:solidFill>
@@ -13436,7 +13450,7 @@
                     <a:lstStyle/>
                     <a:p>
                       <a:pPr algn="ctr">
-                        <a:defRPr sz="1100" b="1">
+                        <a:defRPr sz="1050" b="1">
                           <a:solidFill>
                             <a:srgbClr val="FFFFFF"/>
                           </a:solidFill>
@@ -13460,7 +13474,7 @@
                     <a:lstStyle/>
                     <a:p>
                       <a:pPr algn="ctr">
-                        <a:defRPr sz="1100" b="1">
+                        <a:defRPr sz="1050" b="1">
                           <a:solidFill>
                             <a:srgbClr val="FFFFFF"/>
                           </a:solidFill>
@@ -13468,7 +13482,7 @@
                         </a:defRPr>
                       </a:pPr>
                       <a:r>
-                        <a:t>Ann. Sharpe</a:t>
+                        <a:t>Sharpe</a:t>
                       </a:r>
                     </a:p>
                   </a:txBody>
@@ -13479,14 +13493,14 @@
                   </a:tcPr>
                 </a:tc>
               </a:tr>
-              <a:tr h="932688">
+              <a:tr h="493776">
                 <a:tc>
                   <a:txBody>
                     <a:bodyPr/>
                     <a:lstStyle/>
                     <a:p>
                       <a:pPr algn="l">
-                        <a:defRPr sz="1050" b="1">
+                        <a:defRPr sz="1000" b="1">
                           <a:solidFill>
                             <a:srgbClr val="0F2043"/>
                           </a:solidFill>
@@ -13494,7 +13508,7 @@
                         </a:defRPr>
                       </a:pPr>
                       <a:r>
-                        <a:t>TFDMGA (Proposed)</a:t>
+                        <a:t>TFDMGA</a:t>
                       </a:r>
                     </a:p>
                   </a:txBody>
@@ -13510,7 +13524,7 @@
                     <a:lstStyle/>
                     <a:p>
                       <a:pPr algn="ctr">
-                        <a:defRPr sz="1050">
+                        <a:defRPr sz="1000">
                           <a:solidFill>
                             <a:srgbClr val="1E293B"/>
                           </a:solidFill>
@@ -13534,7 +13548,7 @@
                     <a:lstStyle/>
                     <a:p>
                       <a:pPr algn="ctr">
-                        <a:defRPr sz="1050">
+                        <a:defRPr sz="1000">
                           <a:solidFill>
                             <a:srgbClr val="1E293B"/>
                           </a:solidFill>
@@ -13558,7 +13572,7 @@
                     <a:lstStyle/>
                     <a:p>
                       <a:pPr algn="ctr">
-                        <a:defRPr sz="1050">
+                        <a:defRPr sz="1000">
                           <a:solidFill>
                             <a:srgbClr val="1E293B"/>
                           </a:solidFill>
@@ -13582,7 +13596,7 @@
                     <a:lstStyle/>
                     <a:p>
                       <a:pPr algn="ctr">
-                        <a:defRPr sz="1050">
+                        <a:defRPr sz="1000">
                           <a:solidFill>
                             <a:srgbClr val="1E293B"/>
                           </a:solidFill>
@@ -13606,7 +13620,7 @@
                     <a:lstStyle/>
                     <a:p>
                       <a:pPr algn="ctr">
-                        <a:defRPr sz="1050">
+                        <a:defRPr sz="1000">
                           <a:solidFill>
                             <a:srgbClr val="1E293B"/>
                           </a:solidFill>
@@ -13625,14 +13639,14 @@
                   </a:tcPr>
                 </a:tc>
               </a:tr>
-              <a:tr h="932688">
+              <a:tr h="493776">
                 <a:tc>
                   <a:txBody>
                     <a:bodyPr/>
                     <a:lstStyle/>
                     <a:p>
                       <a:pPr algn="l">
-                        <a:defRPr sz="1050" b="1">
+                        <a:defRPr sz="1000" b="1">
                           <a:solidFill>
                             <a:srgbClr val="0F2043"/>
                           </a:solidFill>
@@ -13640,7 +13654,7 @@
                         </a:defRPr>
                       </a:pPr>
                       <a:r>
-                        <a:t>LSTM Baseline</a:t>
+                        <a:t>LSTM</a:t>
                       </a:r>
                     </a:p>
                   </a:txBody>
@@ -13656,7 +13670,7 @@
                     <a:lstStyle/>
                     <a:p>
                       <a:pPr algn="ctr">
-                        <a:defRPr sz="1050">
+                        <a:defRPr sz="1000">
                           <a:solidFill>
                             <a:srgbClr val="1E293B"/>
                           </a:solidFill>
@@ -13680,7 +13694,7 @@
                     <a:lstStyle/>
                     <a:p>
                       <a:pPr algn="ctr">
-                        <a:defRPr sz="1050">
+                        <a:defRPr sz="1000">
                           <a:solidFill>
                             <a:srgbClr val="1E293B"/>
                           </a:solidFill>
@@ -13704,7 +13718,7 @@
                     <a:lstStyle/>
                     <a:p>
                       <a:pPr algn="ctr">
-                        <a:defRPr sz="1050">
+                        <a:defRPr sz="1000">
                           <a:solidFill>
                             <a:srgbClr val="1E293B"/>
                           </a:solidFill>
@@ -13728,7 +13742,7 @@
                     <a:lstStyle/>
                     <a:p>
                       <a:pPr algn="ctr">
-                        <a:defRPr sz="1050">
+                        <a:defRPr sz="1000">
                           <a:solidFill>
                             <a:srgbClr val="1E293B"/>
                           </a:solidFill>
@@ -13752,7 +13766,7 @@
                     <a:lstStyle/>
                     <a:p>
                       <a:pPr algn="ctr">
-                        <a:defRPr sz="1050">
+                        <a:defRPr sz="1000">
                           <a:solidFill>
                             <a:srgbClr val="1E293B"/>
                           </a:solidFill>
@@ -13771,14 +13785,14 @@
                   </a:tcPr>
                 </a:tc>
               </a:tr>
-              <a:tr h="932688">
+              <a:tr h="493776">
                 <a:tc>
                   <a:txBody>
                     <a:bodyPr/>
                     <a:lstStyle/>
                     <a:p>
                       <a:pPr algn="l">
-                        <a:defRPr sz="1050" b="1">
+                        <a:defRPr sz="1000" b="1">
                           <a:solidFill>
                             <a:srgbClr val="0F2043"/>
                           </a:solidFill>
@@ -13786,7 +13800,7 @@
                         </a:defRPr>
                       </a:pPr>
                       <a:r>
-                        <a:t>XGBoost Baseline</a:t>
+                        <a:t>XGBoost</a:t>
                       </a:r>
                     </a:p>
                   </a:txBody>
@@ -13802,7 +13816,7 @@
                     <a:lstStyle/>
                     <a:p>
                       <a:pPr algn="ctr">
-                        <a:defRPr sz="1050">
+                        <a:defRPr sz="1000">
                           <a:solidFill>
                             <a:srgbClr val="1E293B"/>
                           </a:solidFill>
@@ -13826,7 +13840,7 @@
                     <a:lstStyle/>
                     <a:p>
                       <a:pPr algn="ctr">
-                        <a:defRPr sz="1050">
+                        <a:defRPr sz="1000">
                           <a:solidFill>
                             <a:srgbClr val="1E293B"/>
                           </a:solidFill>
@@ -13850,7 +13864,7 @@
                     <a:lstStyle/>
                     <a:p>
                       <a:pPr algn="ctr">
-                        <a:defRPr sz="1050">
+                        <a:defRPr sz="1000">
                           <a:solidFill>
                             <a:srgbClr val="1E293B"/>
                           </a:solidFill>
@@ -13874,7 +13888,7 @@
                     <a:lstStyle/>
                     <a:p>
                       <a:pPr algn="ctr">
-                        <a:defRPr sz="1050">
+                        <a:defRPr sz="1000">
                           <a:solidFill>
                             <a:srgbClr val="1E293B"/>
                           </a:solidFill>
@@ -13898,7 +13912,7 @@
                     <a:lstStyle/>
                     <a:p>
                       <a:pPr algn="ctr">
-                        <a:defRPr sz="1050">
+                        <a:defRPr sz="1000">
                           <a:solidFill>
                             <a:srgbClr val="1E293B"/>
                           </a:solidFill>
@@ -13917,14 +13931,14 @@
                   </a:tcPr>
                 </a:tc>
               </a:tr>
-              <a:tr h="932688">
+              <a:tr h="493776">
                 <a:tc>
                   <a:txBody>
                     <a:bodyPr/>
                     <a:lstStyle/>
                     <a:p>
                       <a:pPr algn="l">
-                        <a:defRPr sz="1050" b="1">
+                        <a:defRPr sz="1000" b="1">
                           <a:solidFill>
                             <a:srgbClr val="0F2043"/>
                           </a:solidFill>
@@ -13932,7 +13946,7 @@
                         </a:defRPr>
                       </a:pPr>
                       <a:r>
-                        <a:t>Ridge Regression</a:t>
+                        <a:t>Ridge</a:t>
                       </a:r>
                     </a:p>
                   </a:txBody>
@@ -13948,7 +13962,7 @@
                     <a:lstStyle/>
                     <a:p>
                       <a:pPr algn="ctr">
-                        <a:defRPr sz="1050">
+                        <a:defRPr sz="1000">
                           <a:solidFill>
                             <a:srgbClr val="1E293B"/>
                           </a:solidFill>
@@ -13972,7 +13986,7 @@
                     <a:lstStyle/>
                     <a:p>
                       <a:pPr algn="ctr">
-                        <a:defRPr sz="1050">
+                        <a:defRPr sz="1000">
                           <a:solidFill>
                             <a:srgbClr val="1E293B"/>
                           </a:solidFill>
@@ -13996,7 +14010,7 @@
                     <a:lstStyle/>
                     <a:p>
                       <a:pPr algn="ctr">
-                        <a:defRPr sz="1050">
+                        <a:defRPr sz="1000">
                           <a:solidFill>
                             <a:srgbClr val="1E293B"/>
                           </a:solidFill>
@@ -14020,7 +14034,7 @@
                     <a:lstStyle/>
                     <a:p>
                       <a:pPr algn="ctr">
-                        <a:defRPr sz="1050">
+                        <a:defRPr sz="1000">
                           <a:solidFill>
                             <a:srgbClr val="1E293B"/>
                           </a:solidFill>
@@ -14044,7 +14058,7 @@
                     <a:lstStyle/>
                     <a:p>
                       <a:pPr algn="ctr">
-                        <a:defRPr sz="1050">
+                        <a:defRPr sz="1000">
                           <a:solidFill>
                             <a:srgbClr val="1E293B"/>
                           </a:solidFill>
@@ -14075,8 +14089,8 @@
         </p:nvSpPr>
         <p:spPr>
           <a:xfrm>
-            <a:off x="7772400" y="1463040"/>
-            <a:ext cx="3687775" cy="4663440"/>
+            <a:off x="731520" y="3977639"/>
+            <a:ext cx="4937760" cy="2240280"/>
           </a:xfrm>
           <a:prstGeom prst="roundRect">
             <a:avLst/>
@@ -14120,8 +14134,8 @@
         </p:nvSpPr>
         <p:spPr>
           <a:xfrm>
-            <a:off x="7955280" y="1645920"/>
-            <a:ext cx="3322015" cy="4297680"/>
+            <a:off x="914400" y="4114799"/>
+            <a:ext cx="4572000" cy="1965960"/>
           </a:xfrm>
           <a:prstGeom prst="rect">
             <a:avLst/>
@@ -14136,9 +14150,9 @@
           <a:p>
             <a:pPr>
               <a:spcAft>
-                <a:spcPts val="1000"/>
+                <a:spcPts val="400"/>
               </a:spcAft>
-              <a:defRPr sz="1400" b="1">
+              <a:defRPr sz="1250" b="1">
                 <a:solidFill>
                   <a:srgbClr val="0F2043"/>
                 </a:solidFill>
@@ -14152,11 +14166,11 @@
           <a:p>
             <a:pPr>
               <a:spcAft>
-                <a:spcPts val="800"/>
+                <a:spcPts val="400"/>
               </a:spcAft>
             </a:pPr>
             <a:r>
-              <a:rPr b="1" sz="1100">
+              <a:rPr b="1" sz="1000">
                 <a:solidFill>
                   <a:srgbClr val="A51C30"/>
                 </a:solidFill>
@@ -14164,24 +14178,22 @@
               <a:t>• DM Stat vs LSTM:</a:t>
             </a:r>
             <a:r>
-              <a:rPr sz="1000">
+              <a:rPr sz="950">
                 <a:solidFill>
                   <a:srgbClr val="1E293B"/>
                 </a:solidFill>
               </a:rPr>
-              <a:t>
-DM = 2.41  (p = 0.016**)
-Statistically superior predictive accuracy over deep recurrent baseline.</a:t>
+              <a:t> DM = 2.41 (p = 0.016**). Superior accuracy over LSTM.</a:t>
             </a:r>
           </a:p>
           <a:p>
             <a:pPr>
               <a:spcAft>
-                <a:spcPts val="800"/>
+                <a:spcPts val="400"/>
               </a:spcAft>
             </a:pPr>
             <a:r>
-              <a:rPr b="1" sz="1100">
+              <a:rPr b="1" sz="1000">
                 <a:solidFill>
                   <a:srgbClr val="A51C30"/>
                 </a:solidFill>
@@ -14189,66 +14201,144 @@
               <a:t>• DM Stat vs XGBoost:</a:t>
             </a:r>
             <a:r>
-              <a:rPr sz="1000">
+              <a:rPr sz="950">
                 <a:solidFill>
                   <a:srgbClr val="1E293B"/>
                 </a:solidFill>
               </a:rPr>
-              <a:t>
-DM = 3.08  (p = 0.002***)
-Significantly outperforms gradient boosted trees at 1% level.</a:t>
+              <a:t> DM = 3.08 (p = 0.002***). Outperforms boosted trees at 1% level.</a:t>
             </a:r>
           </a:p>
           <a:p>
             <a:pPr>
               <a:spcAft>
-                <a:spcPts val="800"/>
+                <a:spcPts val="400"/>
               </a:spcAft>
             </a:pPr>
             <a:r>
-              <a:rPr b="1" sz="1100">
+              <a:rPr b="1" sz="1000">
                 <a:solidFill>
                   <a:srgbClr val="A51C30"/>
                 </a:solidFill>
               </a:rPr>
-              <a:t>• Daily IC Consistency:</a:t>
-            </a:r>
-            <a:r>
-              <a:rPr sz="1000">
+              <a:t>• Signal Consistency:</a:t>
+            </a:r>
+            <a:r>
+              <a:rPr sz="950">
                 <a:solidFill>
                   <a:srgbClr val="1E293B"/>
                 </a:solidFill>
               </a:rPr>
-              <a:t>
-+0.0348 Daily IC translates to a strong annual predictive signal in cross-sectional equity ranking.</a:t>
-            </a:r>
-          </a:p>
-          <a:p>
-            <a:pPr>
-              <a:spcAft>
-                <a:spcPts val="800"/>
-              </a:spcAft>
-            </a:pPr>
-            <a:r>
-              <a:rPr b="1" sz="1100">
-                <a:solidFill>
-                  <a:srgbClr val="A51C30"/>
-                </a:solidFill>
-              </a:rPr>
-              <a:t>• Key Conclusion:</a:t>
-            </a:r>
-            <a:r>
-              <a:rPr sz="1000">
-                <a:solidFill>
-                  <a:srgbClr val="1E293B"/>
-                </a:solidFill>
-              </a:rPr>
-              <a:t>
-Predictive dominance is statistically verified and not an artifact of random sampling noise.</a:t>
-            </a:r>
-          </a:p>
-        </p:txBody>
-      </p:sp>
+              <a:t> Daily IC +0.0348 translates to exceptional annual portfolio sorting.</a:t>
+            </a:r>
+          </a:p>
+        </p:txBody>
+      </p:sp>
+      <p:sp>
+        <p:nvSpPr>
+          <p:cNvPr id="9" name="Rounded Rectangle 8"/>
+          <p:cNvSpPr/>
+          <p:nvPr/>
+        </p:nvSpPr>
+        <p:spPr>
+          <a:xfrm>
+            <a:off x="5943600" y="1371600"/>
+            <a:ext cx="5516575" cy="4846320"/>
+          </a:xfrm>
+          <a:prstGeom prst="roundRect">
+            <a:avLst/>
+          </a:prstGeom>
+          <a:solidFill>
+            <a:srgbClr val="FFFFFF"/>
+          </a:solidFill>
+          <a:ln w="19050">
+            <a:solidFill>
+              <a:srgbClr val="D4AF37"/>
+            </a:solidFill>
+          </a:ln>
+        </p:spPr>
+        <p:style>
+          <a:lnRef idx="1">
+            <a:schemeClr val="accent1"/>
+          </a:lnRef>
+          <a:fillRef idx="3">
+            <a:schemeClr val="accent1"/>
+          </a:fillRef>
+          <a:effectRef idx="2">
+            <a:schemeClr val="accent1"/>
+          </a:effectRef>
+          <a:fontRef idx="minor">
+            <a:schemeClr val="lt1"/>
+          </a:fontRef>
+        </p:style>
+        <p:txBody>
+          <a:bodyPr rtlCol="0" anchor="ctr"/>
+          <a:lstStyle/>
+          <a:p>
+            <a:pPr algn="ctr"/>
+          </a:p>
+        </p:txBody>
+      </p:sp>
+      <p:sp>
+        <p:nvSpPr>
+          <p:cNvPr id="10" name="TextBox 9"/>
+          <p:cNvSpPr txBox="1"/>
+          <p:nvPr/>
+        </p:nvSpPr>
+        <p:spPr>
+          <a:xfrm>
+            <a:off x="6080760" y="1463040"/>
+            <a:ext cx="5242255" cy="320040"/>
+          </a:xfrm>
+          <a:prstGeom prst="rect">
+            <a:avLst/>
+          </a:prstGeom>
+          <a:noFill/>
+        </p:spPr>
+        <p:txBody>
+          <a:bodyPr wrap="square" lIns="0" tIns="0" rIns="0" bIns="0">
+            <a:spAutoFit/>
+          </a:bodyPr>
+          <a:lstStyle/>
+          <a:p>
+            <a:pPr algn="ctr">
+              <a:defRPr sz="1100" b="1">
+                <a:solidFill>
+                  <a:srgbClr val="0F2043"/>
+                </a:solidFill>
+                <a:latin typeface="Arial"/>
+              </a:defRPr>
+            </a:pPr>
+            <a:r>
+              <a:t>Figure 4.4: Out-of-Sample Cumulative Equity Curves (2015–2024)</a:t>
+            </a:r>
+          </a:p>
+        </p:txBody>
+      </p:sp>
+      <p:pic>
+        <p:nvPicPr>
+          <p:cNvPr id="11" name="Picture 10" descr="equity_curves_comparison_21d.png"/>
+          <p:cNvPicPr>
+            <a:picLocks noChangeAspect="1"/>
+          </p:cNvPicPr>
+          <p:nvPr/>
+        </p:nvPicPr>
+        <p:blipFill>
+          <a:blip r:embed="rId2"/>
+          <a:stretch>
+            <a:fillRect/>
+          </a:stretch>
+        </p:blipFill>
+        <p:spPr>
+          <a:xfrm>
+            <a:off x="6126480" y="2537177"/>
+            <a:ext cx="5150815" cy="2698045"/>
+          </a:xfrm>
+          <a:prstGeom prst="rect">
+            <a:avLst/>
+          </a:prstGeom>
+        </p:spPr>
+      </p:pic>
     </p:spTree>
   </p:cSld>
   <p:clrMapOvr>
@@ -14283,7 +14373,7 @@
         </p:nvSpPr>
         <p:spPr>
           <a:xfrm>
-            <a:off x="731520" y="365760"/>
+            <a:off x="731520" y="320040"/>
             <a:ext cx="10728655" cy="822960"/>
           </a:xfrm>
           <a:prstGeom prst="rect">
@@ -14314,7 +14404,7 @@
           </a:p>
           <a:p>
             <a:pPr>
-              <a:defRPr sz="2200" b="1">
+              <a:defRPr sz="2100" b="1">
                 <a:solidFill>
                   <a:srgbClr val="0F2043"/>
                 </a:solidFill>
@@ -14322,7 +14412,7 @@
               </a:defRPr>
             </a:pPr>
             <a:r>
-              <a:t>Model Diagnostics: Component Ablation &amp; SHAP Feature Importance</a:t>
+              <a:t>Model Diagnostics: Component Ablation &amp; SHAP Feature Insights</a:t>
             </a:r>
           </a:p>
         </p:txBody>
@@ -14335,7 +14425,7 @@
         </p:nvSpPr>
         <p:spPr>
           <a:xfrm>
-            <a:off x="731520" y="1234440"/>
+            <a:off x="731520" y="1188720"/>
             <a:ext cx="10728655" cy="36576"/>
           </a:xfrm>
           <a:prstGeom prst="rect">
@@ -14379,7 +14469,7 @@
         <p:spPr>
           <a:xfrm>
             <a:off x="731520" y="6446520"/>
-            <a:ext cx="10728655" cy="320040"/>
+            <a:ext cx="8686800" cy="320040"/>
           </a:xfrm>
           <a:prstGeom prst="rect">
             <a:avLst/>
@@ -14404,19 +14494,6 @@
               <a:t>University of Verona | Department of Economics  •  Murtuza Yusuf Rangwala  •  Supervisor: Prof. Giuseppina Chesini</a:t>
             </a:r>
           </a:p>
-          <a:p>
-            <a:pPr algn="r">
-              <a:defRPr sz="900" b="1">
-                <a:solidFill>
-                  <a:srgbClr val="0F2043"/>
-                </a:solidFill>
-                <a:latin typeface="Calibri"/>
-              </a:defRPr>
-            </a:pPr>
-            <a:r>
-              <a:t>Slide 9 of 14</a:t>
-            </a:r>
-          </a:p>
         </p:txBody>
       </p:sp>
       <p:sp>
@@ -14463,8 +14540,8 @@
         </p:nvSpPr>
         <p:spPr>
           <a:xfrm>
-            <a:off x="731520" y="1463040"/>
-            <a:ext cx="5120640" cy="4663440"/>
+            <a:off x="731520" y="1371600"/>
+            <a:ext cx="4937760" cy="4846320"/>
           </a:xfrm>
           <a:prstGeom prst="roundRect">
             <a:avLst/>
@@ -14508,8 +14585,8 @@
         </p:nvSpPr>
         <p:spPr>
           <a:xfrm>
-            <a:off x="914400" y="1645920"/>
-            <a:ext cx="4754880" cy="4297680"/>
+            <a:off x="914400" y="1554480"/>
+            <a:ext cx="4572000" cy="4480560"/>
           </a:xfrm>
           <a:prstGeom prst="rect">
             <a:avLst/>
@@ -14526,7 +14603,7 @@
               <a:spcAft>
                 <a:spcPts val="800"/>
               </a:spcAft>
-              <a:defRPr sz="1400" b="1">
+              <a:defRPr sz="1350" b="1">
                 <a:solidFill>
                   <a:srgbClr val="0F2043"/>
                 </a:solidFill>
@@ -14544,7 +14621,7 @@
               </a:spcAft>
             </a:pPr>
             <a:r>
-              <a:rPr b="1" sz="1100">
+              <a:rPr b="1" sz="1050">
                 <a:solidFill>
                   <a:srgbClr val="A51C30"/>
                 </a:solidFill>
@@ -14552,7 +14629,7 @@
               <a:t>• Full TFDMGA Model:</a:t>
             </a:r>
             <a:r>
-              <a:rPr sz="1050">
+              <a:rPr sz="1000">
                 <a:solidFill>
                   <a:srgbClr val="1E293B"/>
                 </a:solidFill>
@@ -14567,7 +14644,7 @@
               </a:spcAft>
             </a:pPr>
             <a:r>
-              <a:rPr b="1" sz="1100">
+              <a:rPr b="1" sz="1050">
                 <a:solidFill>
                   <a:srgbClr val="A51C30"/>
                 </a:solidFill>
@@ -14575,7 +14652,7 @@
               <a:t>• w/o Causal TCN:</a:t>
             </a:r>
             <a:r>
-              <a:rPr sz="1050">
+              <a:rPr sz="1000">
                 <a:solidFill>
                   <a:srgbClr val="1E293B"/>
                 </a:solidFill>
@@ -14590,7 +14667,7 @@
               </a:spcAft>
             </a:pPr>
             <a:r>
-              <a:rPr b="1" sz="1100">
+              <a:rPr b="1" sz="1050">
                 <a:solidFill>
                   <a:srgbClr val="A51C30"/>
                 </a:solidFill>
@@ -14598,7 +14675,7 @@
               <a:t>• w/o Ring Attention:</a:t>
             </a:r>
             <a:r>
-              <a:rPr sz="1050">
+              <a:rPr sz="1000">
                 <a:solidFill>
                   <a:srgbClr val="1E293B"/>
                 </a:solidFill>
@@ -14613,7 +14690,7 @@
               </a:spcAft>
             </a:pPr>
             <a:r>
-              <a:rPr b="1" sz="1100">
+              <a:rPr b="1" sz="1050">
                 <a:solidFill>
                   <a:srgbClr val="A51C30"/>
                 </a:solidFill>
@@ -14621,7 +14698,7 @@
               <a:t>• w/o 3-Way Macro Gate:</a:t>
             </a:r>
             <a:r>
-              <a:rPr sz="1050">
+              <a:rPr sz="1000">
                 <a:solidFill>
                   <a:srgbClr val="1E293B"/>
                 </a:solidFill>
@@ -14632,9 +14709,9 @@
           <a:p>
             <a:pPr>
               <a:spcBef>
-                <a:spcPts val="800"/>
+                <a:spcPts val="1000"/>
               </a:spcBef>
-              <a:defRPr sz="1000" i="1">
+              <a:defRPr sz="950" i="1">
                 <a:solidFill>
                   <a:srgbClr val="1E293B"/>
                 </a:solidFill>
@@ -14642,7 +14719,7 @@
               </a:defRPr>
             </a:pPr>
             <a:r>
-              <a:t>Takeaway: Removing any single architectural block causes a statistically significant drop in predictive IC, confirming that temporal convolution, sequence attention, and macro gating work in active synergy.</a:t>
+              <a:t>Takeaway: Removing any architectural block causes a statistically significant drop in predictive IC, confirming that temporal convolution, sequence attention, and macro gating work in active synergy.</a:t>
             </a:r>
           </a:p>
         </p:txBody>
@@ -14655,8 +14732,8 @@
         </p:nvSpPr>
         <p:spPr>
           <a:xfrm>
-            <a:off x="6126480" y="1463040"/>
-            <a:ext cx="5333695" cy="4663440"/>
+            <a:off x="5943600" y="1371600"/>
+            <a:ext cx="5516575" cy="4846320"/>
           </a:xfrm>
           <a:prstGeom prst="roundRect">
             <a:avLst/>
@@ -14700,8 +14777,8 @@
         </p:nvSpPr>
         <p:spPr>
           <a:xfrm>
-            <a:off x="6309360" y="1645920"/>
-            <a:ext cx="4967935" cy="4297680"/>
+            <a:off x="6080760" y="1463040"/>
+            <a:ext cx="5242255" cy="320040"/>
           </a:xfrm>
           <a:prstGeom prst="rect">
             <a:avLst/>
@@ -14709,16 +14786,13 @@
           <a:noFill/>
         </p:spPr>
         <p:txBody>
-          <a:bodyPr wrap="square">
+          <a:bodyPr wrap="square" lIns="0" tIns="0" rIns="0" bIns="0">
             <a:spAutoFit/>
           </a:bodyPr>
           <a:lstStyle/>
           <a:p>
-            <a:pPr>
-              <a:spcAft>
-                <a:spcPts val="800"/>
-              </a:spcAft>
-              <a:defRPr sz="1400" b="1">
+            <a:pPr algn="ctr">
+              <a:defRPr sz="1100" b="1">
                 <a:solidFill>
                   <a:srgbClr val="0F2043"/>
                 </a:solidFill>
@@ -14726,126 +14800,35 @@
               </a:defRPr>
             </a:pPr>
             <a:r>
-              <a:t>SHAP Top Predictive Feature Ranking</a:t>
-            </a:r>
-          </a:p>
-          <a:p>
-            <a:pPr>
-              <a:spcAft>
-                <a:spcPts val="500"/>
-              </a:spcAft>
-            </a:pPr>
-            <a:r>
-              <a:rPr b="1" sz="1050">
-                <a:solidFill>
-                  <a:srgbClr val="0F2043"/>
-                </a:solidFill>
-              </a:rPr>
-              <a:t>1. ROIC &amp; Free Cash Flow Yield: </a:t>
-            </a:r>
-            <a:r>
-              <a:rPr sz="1000">
-                <a:solidFill>
-                  <a:srgbClr val="1E293B"/>
-                </a:solidFill>
-              </a:rPr>
-              <a:t> Strongest positive drivers during low-volatility expansionary regimes.</a:t>
-            </a:r>
-          </a:p>
-          <a:p>
-            <a:pPr>
-              <a:spcAft>
-                <a:spcPts val="500"/>
-              </a:spcAft>
-            </a:pPr>
-            <a:r>
-              <a:rPr b="1" sz="1050">
-                <a:solidFill>
-                  <a:srgbClr val="0F2043"/>
-                </a:solidFill>
-              </a:rPr>
-              <a:t>2. 10Y-2Y Treasury Yield Spread: </a:t>
-            </a:r>
-            <a:r>
-              <a:rPr sz="1000">
-                <a:solidFill>
-                  <a:srgbClr val="1E293B"/>
-                </a:solidFill>
-              </a:rPr>
-              <a:t> Primary macro gating variable shifting allocation between value &amp; growth factors.</a:t>
-            </a:r>
-          </a:p>
-          <a:p>
-            <a:pPr>
-              <a:spcAft>
-                <a:spcPts val="500"/>
-              </a:spcAft>
-            </a:pPr>
-            <a:r>
-              <a:rPr b="1" sz="1050">
-                <a:solidFill>
-                  <a:srgbClr val="0F2043"/>
-                </a:solidFill>
-              </a:rPr>
-              <a:t>3. Realized Volatility (20d): </a:t>
-            </a:r>
-            <a:r>
-              <a:rPr sz="1000">
-                <a:solidFill>
-                  <a:srgbClr val="1E293B"/>
-                </a:solidFill>
-              </a:rPr>
-              <a:t> Main risk modifier; dampens exposure during market turbulence.</a:t>
-            </a:r>
-          </a:p>
-          <a:p>
-            <a:pPr>
-              <a:spcAft>
-                <a:spcPts val="500"/>
-              </a:spcAft>
-            </a:pPr>
-            <a:r>
-              <a:rPr b="1" sz="1050">
-                <a:solidFill>
-                  <a:srgbClr val="0F2043"/>
-                </a:solidFill>
-              </a:rPr>
-              <a:t>4. Short-Term Return Momentum (1M): </a:t>
-            </a:r>
-            <a:r>
-              <a:rPr sz="1000">
-                <a:solidFill>
-                  <a:srgbClr val="1E293B"/>
-                </a:solidFill>
-              </a:rPr>
-              <a:t> High short-term predictive lift when conditioned on VIX stability.</a:t>
-            </a:r>
-          </a:p>
-          <a:p>
-            <a:pPr>
-              <a:spcAft>
-                <a:spcPts val="500"/>
-              </a:spcAft>
-            </a:pPr>
-            <a:r>
-              <a:rPr b="1" sz="1050">
-                <a:solidFill>
-                  <a:srgbClr val="0F2043"/>
-                </a:solidFill>
-              </a:rPr>
-              <a:t>5. RMW Profitability Beta: </a:t>
-            </a:r>
-            <a:r>
-              <a:rPr sz="1000">
-                <a:solidFill>
-                  <a:srgbClr val="1E293B"/>
-                </a:solidFill>
-              </a:rPr>
-              <a:t> Strong alignment with Fama-French robust profitability factor loadings.</a:t>
-            </a:r>
-          </a:p>
-        </p:txBody>
-      </p:sp>
+              <a:t>Figure 4.8: SHAP Feature Importance &amp; Impact Distribution</a:t>
+            </a:r>
+          </a:p>
+        </p:txBody>
+      </p:sp>
+      <p:pic>
+        <p:nvPicPr>
+          <p:cNvPr id="10" name="Picture 9" descr="shap_summary_plot_21d_feattech_fund.png"/>
+          <p:cNvPicPr>
+            <a:picLocks noChangeAspect="1"/>
+          </p:cNvPicPr>
+          <p:nvPr/>
+        </p:nvPicPr>
+        <p:blipFill>
+          <a:blip r:embed="rId2"/>
+          <a:stretch>
+            <a:fillRect/>
+          </a:stretch>
+        </p:blipFill>
+        <p:spPr>
+          <a:xfrm>
+            <a:off x="6126480" y="2053698"/>
+            <a:ext cx="5150815" cy="3665002"/>
+          </a:xfrm>
+          <a:prstGeom prst="rect">
+            <a:avLst/>
+          </a:prstGeom>
+        </p:spPr>
+      </p:pic>
     </p:spTree>
   </p:cSld>
   <p:clrMapOvr>

--- a/defence_presentation.pptx
+++ b/defence_presentation.pptx
@@ -3244,7 +3244,7 @@
               </a:defRPr>
             </a:pPr>
             <a:r>
-              <a:t>Master's Degree Thesis Defence in Economics and Data Analysis</a:t>
+              <a:t>Master's Degree Thesis Defence in Economics and Data Analysis | Academic Year 2025/2026</a:t>
             </a:r>
           </a:p>
         </p:txBody>

--- a/defence_presentation.pptx
+++ b/defence_presentation.pptx
@@ -3395,7 +3395,7 @@
               </a:defRPr>
             </a:pPr>
             <a:r>
-              <a:t>Supervisor: Prof. Giuseppina Chesini</a:t>
+              <a:t>Relatrice: Prof.ssa Giuseppina Chesini   •   Correlatrice: Prof.ssa Laura Chiaramonte</a:t>
             </a:r>
           </a:p>
           <a:p>
